--- a/仕様書/ギミック.pptx
+++ b/仕様書/ギミック.pptx
@@ -5,7 +5,11 @@
     <p:sldMasterId id="2147483648" r:id="rId1"/>
   </p:sldMasterIdLst>
   <p:sldIdLst>
-    <p:sldId id="256" r:id="rId2"/>
+    <p:sldId id="257" r:id="rId2"/>
+    <p:sldId id="258" r:id="rId3"/>
+    <p:sldId id="259" r:id="rId4"/>
+    <p:sldId id="256" r:id="rId5"/>
+    <p:sldId id="260" r:id="rId6"/>
   </p:sldIdLst>
   <p:sldSz cx="12192000" cy="6858000"/>
   <p:notesSz cx="6858000" cy="9144000"/>
@@ -104,6 +108,11 @@
       </a:defRPr>
     </a:lvl9pPr>
   </p:defaultTextStyle>
+  <p:extLst>
+    <p:ext uri="{EFAFB233-063F-42B5-8137-9DF3F51BA10A}">
+      <p15:sldGuideLst xmlns:p15="http://schemas.microsoft.com/office/powerpoint/2012/main"/>
+    </p:ext>
+  </p:extLst>
 </p:presentation>
 </file>
 
@@ -254,7 +263,7 @@
           <a:p>
             <a:fld id="{507A217A-A4D5-40C6-A880-86A18C175984}" type="datetimeFigureOut">
               <a:rPr kumimoji="1" lang="ja-JP" altLang="en-US" smtClean="0"/>
-              <a:t>2026/6/2</a:t>
+              <a:t>2026/6/4</a:t>
             </a:fld>
             <a:endParaRPr kumimoji="1" lang="ja-JP" altLang="en-US"/>
           </a:p>
@@ -484,7 +493,7 @@
           <a:p>
             <a:fld id="{507A217A-A4D5-40C6-A880-86A18C175984}" type="datetimeFigureOut">
               <a:rPr kumimoji="1" lang="ja-JP" altLang="en-US" smtClean="0"/>
-              <a:t>2026/6/2</a:t>
+              <a:t>2026/6/4</a:t>
             </a:fld>
             <a:endParaRPr kumimoji="1" lang="ja-JP" altLang="en-US"/>
           </a:p>
@@ -724,7 +733,7 @@
           <a:p>
             <a:fld id="{507A217A-A4D5-40C6-A880-86A18C175984}" type="datetimeFigureOut">
               <a:rPr kumimoji="1" lang="ja-JP" altLang="en-US" smtClean="0"/>
-              <a:t>2026/6/2</a:t>
+              <a:t>2026/6/4</a:t>
             </a:fld>
             <a:endParaRPr kumimoji="1" lang="ja-JP" altLang="en-US"/>
           </a:p>
@@ -954,7 +963,7 @@
           <a:p>
             <a:fld id="{507A217A-A4D5-40C6-A880-86A18C175984}" type="datetimeFigureOut">
               <a:rPr kumimoji="1" lang="ja-JP" altLang="en-US" smtClean="0"/>
-              <a:t>2026/6/2</a:t>
+              <a:t>2026/6/4</a:t>
             </a:fld>
             <a:endParaRPr kumimoji="1" lang="ja-JP" altLang="en-US"/>
           </a:p>
@@ -1229,7 +1238,7 @@
           <a:p>
             <a:fld id="{507A217A-A4D5-40C6-A880-86A18C175984}" type="datetimeFigureOut">
               <a:rPr kumimoji="1" lang="ja-JP" altLang="en-US" smtClean="0"/>
-              <a:t>2026/6/2</a:t>
+              <a:t>2026/6/4</a:t>
             </a:fld>
             <a:endParaRPr kumimoji="1" lang="ja-JP" altLang="en-US"/>
           </a:p>
@@ -1558,7 +1567,7 @@
           <a:p>
             <a:fld id="{507A217A-A4D5-40C6-A880-86A18C175984}" type="datetimeFigureOut">
               <a:rPr kumimoji="1" lang="ja-JP" altLang="en-US" smtClean="0"/>
-              <a:t>2026/6/2</a:t>
+              <a:t>2026/6/4</a:t>
             </a:fld>
             <a:endParaRPr kumimoji="1" lang="ja-JP" altLang="en-US"/>
           </a:p>
@@ -2034,7 +2043,7 @@
           <a:p>
             <a:fld id="{507A217A-A4D5-40C6-A880-86A18C175984}" type="datetimeFigureOut">
               <a:rPr kumimoji="1" lang="ja-JP" altLang="en-US" smtClean="0"/>
-              <a:t>2026/6/2</a:t>
+              <a:t>2026/6/4</a:t>
             </a:fld>
             <a:endParaRPr kumimoji="1" lang="ja-JP" altLang="en-US"/>
           </a:p>
@@ -2175,7 +2184,7 @@
           <a:p>
             <a:fld id="{507A217A-A4D5-40C6-A880-86A18C175984}" type="datetimeFigureOut">
               <a:rPr kumimoji="1" lang="ja-JP" altLang="en-US" smtClean="0"/>
-              <a:t>2026/6/2</a:t>
+              <a:t>2026/6/4</a:t>
             </a:fld>
             <a:endParaRPr kumimoji="1" lang="ja-JP" altLang="en-US"/>
           </a:p>
@@ -2288,7 +2297,7 @@
           <a:p>
             <a:fld id="{507A217A-A4D5-40C6-A880-86A18C175984}" type="datetimeFigureOut">
               <a:rPr kumimoji="1" lang="ja-JP" altLang="en-US" smtClean="0"/>
-              <a:t>2026/6/2</a:t>
+              <a:t>2026/6/4</a:t>
             </a:fld>
             <a:endParaRPr kumimoji="1" lang="ja-JP" altLang="en-US"/>
           </a:p>
@@ -2631,7 +2640,7 @@
           <a:p>
             <a:fld id="{507A217A-A4D5-40C6-A880-86A18C175984}" type="datetimeFigureOut">
               <a:rPr kumimoji="1" lang="ja-JP" altLang="en-US" smtClean="0"/>
-              <a:t>2026/6/2</a:t>
+              <a:t>2026/6/4</a:t>
             </a:fld>
             <a:endParaRPr kumimoji="1" lang="ja-JP" altLang="en-US"/>
           </a:p>
@@ -2919,7 +2928,7 @@
           <a:p>
             <a:fld id="{507A217A-A4D5-40C6-A880-86A18C175984}" type="datetimeFigureOut">
               <a:rPr kumimoji="1" lang="ja-JP" altLang="en-US" smtClean="0"/>
-              <a:t>2026/6/2</a:t>
+              <a:t>2026/6/4</a:t>
             </a:fld>
             <a:endParaRPr kumimoji="1" lang="ja-JP" altLang="en-US"/>
           </a:p>
@@ -3192,7 +3201,7 @@
           <a:p>
             <a:fld id="{507A217A-A4D5-40C6-A880-86A18C175984}" type="datetimeFigureOut">
               <a:rPr kumimoji="1" lang="ja-JP" altLang="en-US" smtClean="0"/>
-              <a:t>2026/6/2</a:t>
+              <a:t>2026/6/4</a:t>
             </a:fld>
             <a:endParaRPr kumimoji="1" lang="ja-JP" altLang="en-US"/>
           </a:p>
@@ -3614,7 +3623,7 @@
           <p:cNvPr id="4" name="テキスト ボックス 3">
             <a:extLst>
               <a:ext uri="{FF2B5EF4-FFF2-40B4-BE49-F238E27FC236}">
-                <a16:creationId xmlns:a16="http://schemas.microsoft.com/office/drawing/2014/main" id="{FEF63240-3663-4130-9CE1-908388D4C1CA}"/>
+                <a16:creationId xmlns:a16="http://schemas.microsoft.com/office/drawing/2014/main" id="{1E87C264-930C-4612-A519-F218D2F1120C}"/>
               </a:ext>
             </a:extLst>
           </p:cNvPr>
@@ -3624,7 +3633,7 @@
         <p:spPr>
           <a:xfrm>
             <a:off x="0" y="0"/>
-            <a:ext cx="3257550" cy="769441"/>
+            <a:ext cx="8058150" cy="769441"/>
           </a:xfrm>
           <a:prstGeom prst="rect">
             <a:avLst/>
@@ -3639,7 +3648,7 @@
           <a:p>
             <a:r>
               <a:rPr kumimoji="1" lang="ja-JP" altLang="en-US" sz="4400" dirty="0"/>
-              <a:t>ギミック</a:t>
+              <a:t>ギミック：色玉</a:t>
             </a:r>
           </a:p>
         </p:txBody>
@@ -3649,7 +3658,7 @@
           <p:cNvPr id="5" name="テキスト ボックス 4">
             <a:extLst>
               <a:ext uri="{FF2B5EF4-FFF2-40B4-BE49-F238E27FC236}">
-                <a16:creationId xmlns:a16="http://schemas.microsoft.com/office/drawing/2014/main" id="{8B45DA6A-130A-460D-AA17-042EBE64B8A7}"/>
+                <a16:creationId xmlns:a16="http://schemas.microsoft.com/office/drawing/2014/main" id="{1C6BC0A9-07E6-4CC4-9437-CE18C7EFB205}"/>
               </a:ext>
             </a:extLst>
           </p:cNvPr>
@@ -3658,8 +3667,8 @@
         </p:nvSpPr>
         <p:spPr>
           <a:xfrm>
-            <a:off x="2386013" y="200054"/>
-            <a:ext cx="5493812" cy="369332"/>
+            <a:off x="0" y="746484"/>
+            <a:ext cx="8802410" cy="584775"/>
           </a:xfrm>
           <a:prstGeom prst="rect">
             <a:avLst/>
@@ -3673,8 +3682,12 @@
           <a:lstStyle/>
           <a:p>
             <a:r>
-              <a:rPr kumimoji="1" lang="ja-JP" altLang="en-US" dirty="0"/>
-              <a:t>色のついた玉にダッシュ状態で触れると使用される</a:t>
+              <a:rPr lang="ja-JP" altLang="en-US" sz="3200" dirty="0"/>
+              <a:t>黄</a:t>
+            </a:r>
+            <a:r>
+              <a:rPr kumimoji="1" lang="ja-JP" altLang="en-US" sz="3200" dirty="0"/>
+              <a:t>玉：スタミナが回復し、玉の場所でとどまる</a:t>
             </a:r>
           </a:p>
         </p:txBody>
@@ -3684,7 +3697,7 @@
           <p:cNvPr id="6" name="テキスト ボックス 5">
             <a:extLst>
               <a:ext uri="{FF2B5EF4-FFF2-40B4-BE49-F238E27FC236}">
-                <a16:creationId xmlns:a16="http://schemas.microsoft.com/office/drawing/2014/main" id="{F17ECB5D-02B4-41EA-9642-5792D47FBCEE}"/>
+                <a16:creationId xmlns:a16="http://schemas.microsoft.com/office/drawing/2014/main" id="{7EB9EF8E-6F90-4A2E-8767-807AED020ADE}"/>
               </a:ext>
             </a:extLst>
           </p:cNvPr>
@@ -3693,8 +3706,8 @@
         </p:nvSpPr>
         <p:spPr>
           <a:xfrm>
-            <a:off x="0" y="769441"/>
-            <a:ext cx="4288353" cy="584775"/>
+            <a:off x="0" y="1304650"/>
+            <a:ext cx="2723823" cy="369332"/>
           </a:xfrm>
           <a:prstGeom prst="rect">
             <a:avLst/>
@@ -3708,18 +3721,18 @@
           <a:lstStyle/>
           <a:p>
             <a:r>
-              <a:rPr kumimoji="1" lang="ja-JP" altLang="en-US" sz="3200" dirty="0"/>
-              <a:t>青玉：スタミナが回復</a:t>
+              <a:rPr kumimoji="1" lang="ja-JP" altLang="en-US" dirty="0"/>
+              <a:t>この玉が基本の形になる</a:t>
             </a:r>
           </a:p>
         </p:txBody>
       </p:sp>
       <p:pic>
         <p:nvPicPr>
-          <p:cNvPr id="8" name="図 7">
-            <a:extLst>
-              <a:ext uri="{FF2B5EF4-FFF2-40B4-BE49-F238E27FC236}">
-                <a16:creationId xmlns:a16="http://schemas.microsoft.com/office/drawing/2014/main" id="{69F8786D-BA83-4B21-B783-1C67E7E02ECF}"/>
+          <p:cNvPr id="7" name="図 6">
+            <a:extLst>
+              <a:ext uri="{FF2B5EF4-FFF2-40B4-BE49-F238E27FC236}">
+                <a16:creationId xmlns:a16="http://schemas.microsoft.com/office/drawing/2014/main" id="{29DAD19E-51A6-4F16-93B7-4C5B7AA40459}"/>
               </a:ext>
             </a:extLst>
           </p:cNvPr>
@@ -3742,8 +3755,2105 @@
         </p:blipFill>
         <p:spPr>
           <a:xfrm>
-            <a:off x="328613" y="3893446"/>
+            <a:off x="90648" y="2967492"/>
             <a:ext cx="2249226" cy="2022932"/>
+          </a:xfrm>
+          <a:prstGeom prst="rect">
+            <a:avLst/>
+          </a:prstGeom>
+        </p:spPr>
+      </p:pic>
+      <p:pic>
+        <p:nvPicPr>
+          <p:cNvPr id="10" name="図 9">
+            <a:extLst>
+              <a:ext uri="{FF2B5EF4-FFF2-40B4-BE49-F238E27FC236}">
+                <a16:creationId xmlns:a16="http://schemas.microsoft.com/office/drawing/2014/main" id="{BBD05975-C320-47C6-9A53-593054BA2F9A}"/>
+              </a:ext>
+            </a:extLst>
+          </p:cNvPr>
+          <p:cNvPicPr>
+            <a:picLocks noChangeAspect="1"/>
+          </p:cNvPicPr>
+          <p:nvPr/>
+        </p:nvPicPr>
+        <p:blipFill>
+          <a:blip r:embed="rId2">
+            <a:extLst>
+              <a:ext uri="{28A0092B-C50C-407E-A947-70E740481C1C}">
+                <a14:useLocalDpi xmlns:a14="http://schemas.microsoft.com/office/drawing/2010/main" val="0"/>
+              </a:ext>
+            </a:extLst>
+          </a:blip>
+          <a:stretch>
+            <a:fillRect/>
+          </a:stretch>
+        </p:blipFill>
+        <p:spPr>
+          <a:xfrm>
+            <a:off x="9184964" y="1346540"/>
+            <a:ext cx="2249226" cy="2022932"/>
+          </a:xfrm>
+          <a:prstGeom prst="rect">
+            <a:avLst/>
+          </a:prstGeom>
+        </p:spPr>
+      </p:pic>
+      <p:sp>
+        <p:nvSpPr>
+          <p:cNvPr id="12" name="テキスト ボックス 11">
+            <a:extLst>
+              <a:ext uri="{FF2B5EF4-FFF2-40B4-BE49-F238E27FC236}">
+                <a16:creationId xmlns:a16="http://schemas.microsoft.com/office/drawing/2014/main" id="{B1088A65-F278-4776-BBD8-75DF1CD9C07B}"/>
+              </a:ext>
+            </a:extLst>
+          </p:cNvPr>
+          <p:cNvSpPr txBox="1"/>
+          <p:nvPr/>
+        </p:nvSpPr>
+        <p:spPr>
+          <a:xfrm>
+            <a:off x="4480250" y="4524958"/>
+            <a:ext cx="2564338" cy="923330"/>
+          </a:xfrm>
+          <a:prstGeom prst="rect">
+            <a:avLst/>
+          </a:prstGeom>
+          <a:noFill/>
+        </p:spPr>
+        <p:txBody>
+          <a:bodyPr wrap="square" rtlCol="0">
+            <a:spAutoFit/>
+          </a:bodyPr>
+          <a:lstStyle/>
+          <a:p>
+            <a:r>
+              <a:rPr kumimoji="1" lang="ja-JP" altLang="en-US" dirty="0"/>
+              <a:t>黄玉にダッシュすると</a:t>
+            </a:r>
+            <a:endParaRPr kumimoji="1" lang="en-US" altLang="ja-JP" dirty="0"/>
+          </a:p>
+          <a:p>
+            <a:r>
+              <a:rPr lang="ja-JP" altLang="en-US" dirty="0"/>
+              <a:t>ダッシュするまで黄玉に場所で止まる</a:t>
+            </a:r>
+            <a:endParaRPr kumimoji="1" lang="ja-JP" altLang="en-US" dirty="0"/>
+          </a:p>
+        </p:txBody>
+      </p:sp>
+      <p:sp>
+        <p:nvSpPr>
+          <p:cNvPr id="13" name="テキスト ボックス 12">
+            <a:extLst>
+              <a:ext uri="{FF2B5EF4-FFF2-40B4-BE49-F238E27FC236}">
+                <a16:creationId xmlns:a16="http://schemas.microsoft.com/office/drawing/2014/main" id="{827A75BB-8F25-4D99-AC5E-E66F7B24AD7B}"/>
+              </a:ext>
+            </a:extLst>
+          </p:cNvPr>
+          <p:cNvSpPr txBox="1"/>
+          <p:nvPr/>
+        </p:nvSpPr>
+        <p:spPr>
+          <a:xfrm>
+            <a:off x="7138417" y="3313427"/>
+            <a:ext cx="2249226" cy="646331"/>
+          </a:xfrm>
+          <a:prstGeom prst="rect">
+            <a:avLst/>
+          </a:prstGeom>
+          <a:noFill/>
+        </p:spPr>
+        <p:txBody>
+          <a:bodyPr wrap="square" rtlCol="0">
+            <a:spAutoFit/>
+          </a:bodyPr>
+          <a:lstStyle/>
+          <a:p>
+            <a:r>
+              <a:rPr kumimoji="1" lang="ja-JP" altLang="en-US" dirty="0"/>
+              <a:t>ダッシュした後も残り続ける</a:t>
+            </a:r>
+          </a:p>
+        </p:txBody>
+      </p:sp>
+      <p:pic>
+        <p:nvPicPr>
+          <p:cNvPr id="15" name="図 14">
+            <a:extLst>
+              <a:ext uri="{FF2B5EF4-FFF2-40B4-BE49-F238E27FC236}">
+                <a16:creationId xmlns:a16="http://schemas.microsoft.com/office/drawing/2014/main" id="{A1465065-8286-42A3-BFC6-0DC810101233}"/>
+              </a:ext>
+            </a:extLst>
+          </p:cNvPr>
+          <p:cNvPicPr>
+            <a:picLocks noChangeAspect="1"/>
+          </p:cNvPicPr>
+          <p:nvPr/>
+        </p:nvPicPr>
+        <p:blipFill>
+          <a:blip r:embed="rId3">
+            <a:extLst>
+              <a:ext uri="{28A0092B-C50C-407E-A947-70E740481C1C}">
+                <a14:useLocalDpi xmlns:a14="http://schemas.microsoft.com/office/drawing/2010/main" val="0"/>
+              </a:ext>
+            </a:extLst>
+          </a:blip>
+          <a:stretch>
+            <a:fillRect/>
+          </a:stretch>
+        </p:blipFill>
+        <p:spPr>
+          <a:xfrm>
+            <a:off x="7896317" y="2383938"/>
+            <a:ext cx="733425" cy="735341"/>
+          </a:xfrm>
+          <a:prstGeom prst="rect">
+            <a:avLst/>
+          </a:prstGeom>
+        </p:spPr>
+      </p:pic>
+      <p:pic>
+        <p:nvPicPr>
+          <p:cNvPr id="16" name="図 15">
+            <a:extLst>
+              <a:ext uri="{FF2B5EF4-FFF2-40B4-BE49-F238E27FC236}">
+                <a16:creationId xmlns:a16="http://schemas.microsoft.com/office/drawing/2014/main" id="{A1EC165B-8305-4297-B881-F90F528B1834}"/>
+              </a:ext>
+            </a:extLst>
+          </p:cNvPr>
+          <p:cNvPicPr>
+            <a:picLocks noChangeAspect="1"/>
+          </p:cNvPicPr>
+          <p:nvPr/>
+        </p:nvPicPr>
+        <p:blipFill>
+          <a:blip r:embed="rId3">
+            <a:extLst>
+              <a:ext uri="{28A0092B-C50C-407E-A947-70E740481C1C}">
+                <a14:useLocalDpi xmlns:a14="http://schemas.microsoft.com/office/drawing/2010/main" val="0"/>
+              </a:ext>
+            </a:extLst>
+          </a:blip>
+          <a:stretch>
+            <a:fillRect/>
+          </a:stretch>
+        </p:blipFill>
+        <p:spPr>
+          <a:xfrm>
+            <a:off x="5439096" y="3001801"/>
+            <a:ext cx="733425" cy="735341"/>
+          </a:xfrm>
+          <a:prstGeom prst="rect">
+            <a:avLst/>
+          </a:prstGeom>
+        </p:spPr>
+      </p:pic>
+      <p:pic>
+        <p:nvPicPr>
+          <p:cNvPr id="9" name="図 8">
+            <a:extLst>
+              <a:ext uri="{FF2B5EF4-FFF2-40B4-BE49-F238E27FC236}">
+                <a16:creationId xmlns:a16="http://schemas.microsoft.com/office/drawing/2014/main" id="{CC03460A-7960-40C6-9676-A04484448945}"/>
+              </a:ext>
+            </a:extLst>
+          </p:cNvPr>
+          <p:cNvPicPr>
+            <a:picLocks noChangeAspect="1"/>
+          </p:cNvPicPr>
+          <p:nvPr/>
+        </p:nvPicPr>
+        <p:blipFill>
+          <a:blip r:embed="rId4">
+            <a:extLst>
+              <a:ext uri="{28A0092B-C50C-407E-A947-70E740481C1C}">
+                <a14:useLocalDpi xmlns:a14="http://schemas.microsoft.com/office/drawing/2010/main" val="0"/>
+              </a:ext>
+            </a:extLst>
+          </a:blip>
+          <a:stretch>
+            <a:fillRect/>
+          </a:stretch>
+        </p:blipFill>
+        <p:spPr>
+          <a:xfrm>
+            <a:off x="3642580" y="2075440"/>
+            <a:ext cx="3122304" cy="3122304"/>
+          </a:xfrm>
+          <a:prstGeom prst="rect">
+            <a:avLst/>
+          </a:prstGeom>
+        </p:spPr>
+      </p:pic>
+      <p:pic>
+        <p:nvPicPr>
+          <p:cNvPr id="18" name="図 17">
+            <a:extLst>
+              <a:ext uri="{FF2B5EF4-FFF2-40B4-BE49-F238E27FC236}">
+                <a16:creationId xmlns:a16="http://schemas.microsoft.com/office/drawing/2014/main" id="{725B7B57-37E8-4A09-B8CC-7DD863C56468}"/>
+              </a:ext>
+            </a:extLst>
+          </p:cNvPr>
+          <p:cNvPicPr>
+            <a:picLocks noChangeAspect="1"/>
+          </p:cNvPicPr>
+          <p:nvPr/>
+        </p:nvPicPr>
+        <p:blipFill>
+          <a:blip r:embed="rId5">
+            <a:extLst>
+              <a:ext uri="{28A0092B-C50C-407E-A947-70E740481C1C}">
+                <a14:useLocalDpi xmlns:a14="http://schemas.microsoft.com/office/drawing/2010/main" val="0"/>
+              </a:ext>
+            </a:extLst>
+          </a:blip>
+          <a:stretch>
+            <a:fillRect/>
+          </a:stretch>
+        </p:blipFill>
+        <p:spPr>
+          <a:xfrm>
+            <a:off x="2437645" y="3061329"/>
+            <a:ext cx="733424" cy="735341"/>
+          </a:xfrm>
+          <a:prstGeom prst="rect">
+            <a:avLst/>
+          </a:prstGeom>
+        </p:spPr>
+      </p:pic>
+      <p:pic>
+        <p:nvPicPr>
+          <p:cNvPr id="19" name="図 18">
+            <a:extLst>
+              <a:ext uri="{FF2B5EF4-FFF2-40B4-BE49-F238E27FC236}">
+                <a16:creationId xmlns:a16="http://schemas.microsoft.com/office/drawing/2014/main" id="{25340FF1-85C9-42E0-BCF1-D543AE085250}"/>
+              </a:ext>
+            </a:extLst>
+          </p:cNvPr>
+          <p:cNvPicPr>
+            <a:picLocks noChangeAspect="1"/>
+          </p:cNvPicPr>
+          <p:nvPr/>
+        </p:nvPicPr>
+        <p:blipFill>
+          <a:blip r:embed="rId3">
+            <a:extLst>
+              <a:ext uri="{28A0092B-C50C-407E-A947-70E740481C1C}">
+                <a14:useLocalDpi xmlns:a14="http://schemas.microsoft.com/office/drawing/2010/main" val="0"/>
+              </a:ext>
+            </a:extLst>
+          </a:blip>
+          <a:stretch>
+            <a:fillRect/>
+          </a:stretch>
+        </p:blipFill>
+        <p:spPr>
+          <a:xfrm>
+            <a:off x="7896316" y="5743845"/>
+            <a:ext cx="733425" cy="735341"/>
+          </a:xfrm>
+          <a:prstGeom prst="rect">
+            <a:avLst/>
+          </a:prstGeom>
+        </p:spPr>
+      </p:pic>
+      <p:sp>
+        <p:nvSpPr>
+          <p:cNvPr id="21" name="楕円 20">
+            <a:extLst>
+              <a:ext uri="{FF2B5EF4-FFF2-40B4-BE49-F238E27FC236}">
+                <a16:creationId xmlns:a16="http://schemas.microsoft.com/office/drawing/2014/main" id="{1423C97B-3BF2-417E-9163-A580A90E72A4}"/>
+              </a:ext>
+            </a:extLst>
+          </p:cNvPr>
+          <p:cNvSpPr/>
+          <p:nvPr/>
+        </p:nvSpPr>
+        <p:spPr>
+          <a:xfrm>
+            <a:off x="8981765" y="6019440"/>
+            <a:ext cx="203199" cy="184150"/>
+          </a:xfrm>
+          <a:prstGeom prst="ellipse">
+            <a:avLst/>
+          </a:prstGeom>
+        </p:spPr>
+        <p:style>
+          <a:lnRef idx="2">
+            <a:schemeClr val="accent1">
+              <a:shade val="50000"/>
+            </a:schemeClr>
+          </a:lnRef>
+          <a:fillRef idx="1">
+            <a:schemeClr val="accent1"/>
+          </a:fillRef>
+          <a:effectRef idx="0">
+            <a:schemeClr val="accent1"/>
+          </a:effectRef>
+          <a:fontRef idx="minor">
+            <a:schemeClr val="lt1"/>
+          </a:fontRef>
+        </p:style>
+        <p:txBody>
+          <a:bodyPr rtlCol="0" anchor="ctr"/>
+          <a:lstStyle/>
+          <a:p>
+            <a:pPr algn="ctr"/>
+            <a:endParaRPr kumimoji="1" lang="ja-JP" altLang="en-US"/>
+          </a:p>
+        </p:txBody>
+      </p:sp>
+      <p:sp>
+        <p:nvSpPr>
+          <p:cNvPr id="22" name="楕円 21">
+            <a:extLst>
+              <a:ext uri="{FF2B5EF4-FFF2-40B4-BE49-F238E27FC236}">
+                <a16:creationId xmlns:a16="http://schemas.microsoft.com/office/drawing/2014/main" id="{35D66EE3-8E81-4ACC-904B-E532DA3BC1A6}"/>
+              </a:ext>
+            </a:extLst>
+          </p:cNvPr>
+          <p:cNvSpPr/>
+          <p:nvPr/>
+        </p:nvSpPr>
+        <p:spPr>
+          <a:xfrm>
+            <a:off x="9826315" y="5927365"/>
+            <a:ext cx="203199" cy="184150"/>
+          </a:xfrm>
+          <a:prstGeom prst="ellipse">
+            <a:avLst/>
+          </a:prstGeom>
+        </p:spPr>
+        <p:style>
+          <a:lnRef idx="2">
+            <a:schemeClr val="accent1">
+              <a:shade val="50000"/>
+            </a:schemeClr>
+          </a:lnRef>
+          <a:fillRef idx="1">
+            <a:schemeClr val="accent1"/>
+          </a:fillRef>
+          <a:effectRef idx="0">
+            <a:schemeClr val="accent1"/>
+          </a:effectRef>
+          <a:fontRef idx="minor">
+            <a:schemeClr val="lt1"/>
+          </a:fontRef>
+        </p:style>
+        <p:txBody>
+          <a:bodyPr rtlCol="0" anchor="ctr"/>
+          <a:lstStyle/>
+          <a:p>
+            <a:pPr algn="ctr"/>
+            <a:endParaRPr kumimoji="1" lang="ja-JP" altLang="en-US"/>
+          </a:p>
+        </p:txBody>
+      </p:sp>
+      <p:sp>
+        <p:nvSpPr>
+          <p:cNvPr id="23" name="楕円 22">
+            <a:extLst>
+              <a:ext uri="{FF2B5EF4-FFF2-40B4-BE49-F238E27FC236}">
+                <a16:creationId xmlns:a16="http://schemas.microsoft.com/office/drawing/2014/main" id="{B3B4F068-6BF8-433C-8E68-8393A4E88148}"/>
+              </a:ext>
+            </a:extLst>
+          </p:cNvPr>
+          <p:cNvSpPr/>
+          <p:nvPr/>
+        </p:nvSpPr>
+        <p:spPr>
+          <a:xfrm>
+            <a:off x="10531165" y="5651770"/>
+            <a:ext cx="203199" cy="184150"/>
+          </a:xfrm>
+          <a:prstGeom prst="ellipse">
+            <a:avLst/>
+          </a:prstGeom>
+        </p:spPr>
+        <p:style>
+          <a:lnRef idx="2">
+            <a:schemeClr val="accent1">
+              <a:shade val="50000"/>
+            </a:schemeClr>
+          </a:lnRef>
+          <a:fillRef idx="1">
+            <a:schemeClr val="accent1"/>
+          </a:fillRef>
+          <a:effectRef idx="0">
+            <a:schemeClr val="accent1"/>
+          </a:effectRef>
+          <a:fontRef idx="minor">
+            <a:schemeClr val="lt1"/>
+          </a:fontRef>
+        </p:style>
+        <p:txBody>
+          <a:bodyPr rtlCol="0" anchor="ctr"/>
+          <a:lstStyle/>
+          <a:p>
+            <a:pPr algn="ctr"/>
+            <a:endParaRPr kumimoji="1" lang="ja-JP" altLang="en-US"/>
+          </a:p>
+        </p:txBody>
+      </p:sp>
+      <p:sp>
+        <p:nvSpPr>
+          <p:cNvPr id="24" name="楕円 23">
+            <a:extLst>
+              <a:ext uri="{FF2B5EF4-FFF2-40B4-BE49-F238E27FC236}">
+                <a16:creationId xmlns:a16="http://schemas.microsoft.com/office/drawing/2014/main" id="{551F616F-BF5A-440A-8E55-3E74636CFB50}"/>
+              </a:ext>
+            </a:extLst>
+          </p:cNvPr>
+          <p:cNvSpPr/>
+          <p:nvPr/>
+        </p:nvSpPr>
+        <p:spPr>
+          <a:xfrm>
+            <a:off x="11070915" y="5105669"/>
+            <a:ext cx="203199" cy="184150"/>
+          </a:xfrm>
+          <a:prstGeom prst="ellipse">
+            <a:avLst/>
+          </a:prstGeom>
+        </p:spPr>
+        <p:style>
+          <a:lnRef idx="2">
+            <a:schemeClr val="accent1">
+              <a:shade val="50000"/>
+            </a:schemeClr>
+          </a:lnRef>
+          <a:fillRef idx="1">
+            <a:schemeClr val="accent1"/>
+          </a:fillRef>
+          <a:effectRef idx="0">
+            <a:schemeClr val="accent1"/>
+          </a:effectRef>
+          <a:fontRef idx="minor">
+            <a:schemeClr val="lt1"/>
+          </a:fontRef>
+        </p:style>
+        <p:txBody>
+          <a:bodyPr rtlCol="0" anchor="ctr"/>
+          <a:lstStyle/>
+          <a:p>
+            <a:pPr algn="ctr"/>
+            <a:endParaRPr kumimoji="1" lang="ja-JP" altLang="en-US"/>
+          </a:p>
+        </p:txBody>
+      </p:sp>
+      <p:sp>
+        <p:nvSpPr>
+          <p:cNvPr id="25" name="楕円 24">
+            <a:extLst>
+              <a:ext uri="{FF2B5EF4-FFF2-40B4-BE49-F238E27FC236}">
+                <a16:creationId xmlns:a16="http://schemas.microsoft.com/office/drawing/2014/main" id="{A5710021-9F7C-45C3-897D-C91C7198BDA8}"/>
+              </a:ext>
+            </a:extLst>
+          </p:cNvPr>
+          <p:cNvSpPr/>
+          <p:nvPr/>
+        </p:nvSpPr>
+        <p:spPr>
+          <a:xfrm>
+            <a:off x="11274114" y="4372193"/>
+            <a:ext cx="203199" cy="184150"/>
+          </a:xfrm>
+          <a:prstGeom prst="ellipse">
+            <a:avLst/>
+          </a:prstGeom>
+        </p:spPr>
+        <p:style>
+          <a:lnRef idx="2">
+            <a:schemeClr val="accent1">
+              <a:shade val="50000"/>
+            </a:schemeClr>
+          </a:lnRef>
+          <a:fillRef idx="1">
+            <a:schemeClr val="accent1"/>
+          </a:fillRef>
+          <a:effectRef idx="0">
+            <a:schemeClr val="accent1"/>
+          </a:effectRef>
+          <a:fontRef idx="minor">
+            <a:schemeClr val="lt1"/>
+          </a:fontRef>
+        </p:style>
+        <p:txBody>
+          <a:bodyPr rtlCol="0" anchor="ctr"/>
+          <a:lstStyle/>
+          <a:p>
+            <a:pPr algn="ctr"/>
+            <a:endParaRPr kumimoji="1" lang="ja-JP" altLang="en-US"/>
+          </a:p>
+        </p:txBody>
+      </p:sp>
+      <p:sp>
+        <p:nvSpPr>
+          <p:cNvPr id="26" name="テキスト ボックス 25">
+            <a:extLst>
+              <a:ext uri="{FF2B5EF4-FFF2-40B4-BE49-F238E27FC236}">
+                <a16:creationId xmlns:a16="http://schemas.microsoft.com/office/drawing/2014/main" id="{EF41DC36-A2CE-4B41-9BA1-31216977B6EE}"/>
+              </a:ext>
+            </a:extLst>
+          </p:cNvPr>
+          <p:cNvSpPr txBox="1"/>
+          <p:nvPr/>
+        </p:nvSpPr>
+        <p:spPr>
+          <a:xfrm>
+            <a:off x="9391833" y="6211669"/>
+            <a:ext cx="2842642" cy="646331"/>
+          </a:xfrm>
+          <a:prstGeom prst="rect">
+            <a:avLst/>
+          </a:prstGeom>
+          <a:noFill/>
+        </p:spPr>
+        <p:txBody>
+          <a:bodyPr wrap="square" rtlCol="0">
+            <a:spAutoFit/>
+          </a:bodyPr>
+          <a:lstStyle/>
+          <a:p>
+            <a:r>
+              <a:rPr kumimoji="1" lang="ja-JP" altLang="en-US" dirty="0"/>
+              <a:t>プレイヤーがダッシュで止まると動くものもある</a:t>
+            </a:r>
+          </a:p>
+        </p:txBody>
+      </p:sp>
+    </p:spTree>
+    <p:extLst>
+      <p:ext uri="{BB962C8B-B14F-4D97-AF65-F5344CB8AC3E}">
+        <p14:creationId xmlns:p14="http://schemas.microsoft.com/office/powerpoint/2010/main" val="2320202040"/>
+      </p:ext>
+    </p:extLst>
+  </p:cSld>
+  <p:clrMapOvr>
+    <a:masterClrMapping/>
+  </p:clrMapOvr>
+</p:sld>
+</file>
+
+<file path=ppt/slides/slide2.xml><?xml version="1.0" encoding="utf-8"?>
+<p:sld xmlns:a="http://schemas.openxmlformats.org/drawingml/2006/main" xmlns:r="http://schemas.openxmlformats.org/officeDocument/2006/relationships" xmlns:p="http://schemas.openxmlformats.org/presentationml/2006/main">
+  <p:cSld>
+    <p:spTree>
+      <p:nvGrpSpPr>
+        <p:cNvPr id="1" name=""/>
+        <p:cNvGrpSpPr/>
+        <p:nvPr/>
+      </p:nvGrpSpPr>
+      <p:grpSpPr>
+        <a:xfrm>
+          <a:off x="0" y="0"/>
+          <a:ext cx="0" cy="0"/>
+          <a:chOff x="0" y="0"/>
+          <a:chExt cx="0" cy="0"/>
+        </a:xfrm>
+      </p:grpSpPr>
+      <p:sp>
+        <p:nvSpPr>
+          <p:cNvPr id="4" name="テキスト ボックス 3">
+            <a:extLst>
+              <a:ext uri="{FF2B5EF4-FFF2-40B4-BE49-F238E27FC236}">
+                <a16:creationId xmlns:a16="http://schemas.microsoft.com/office/drawing/2014/main" id="{1E87C264-930C-4612-A519-F218D2F1120C}"/>
+              </a:ext>
+            </a:extLst>
+          </p:cNvPr>
+          <p:cNvSpPr txBox="1"/>
+          <p:nvPr/>
+        </p:nvSpPr>
+        <p:spPr>
+          <a:xfrm>
+            <a:off x="0" y="0"/>
+            <a:ext cx="8058150" cy="769441"/>
+          </a:xfrm>
+          <a:prstGeom prst="rect">
+            <a:avLst/>
+          </a:prstGeom>
+          <a:noFill/>
+        </p:spPr>
+        <p:txBody>
+          <a:bodyPr wrap="square" rtlCol="0">
+            <a:spAutoFit/>
+          </a:bodyPr>
+          <a:lstStyle/>
+          <a:p>
+            <a:r>
+              <a:rPr kumimoji="1" lang="ja-JP" altLang="en-US" sz="4400" dirty="0"/>
+              <a:t>ギミック：色玉</a:t>
+            </a:r>
+          </a:p>
+        </p:txBody>
+      </p:sp>
+      <p:sp>
+        <p:nvSpPr>
+          <p:cNvPr id="5" name="テキスト ボックス 4">
+            <a:extLst>
+              <a:ext uri="{FF2B5EF4-FFF2-40B4-BE49-F238E27FC236}">
+                <a16:creationId xmlns:a16="http://schemas.microsoft.com/office/drawing/2014/main" id="{1C6BC0A9-07E6-4CC4-9437-CE18C7EFB205}"/>
+              </a:ext>
+            </a:extLst>
+          </p:cNvPr>
+          <p:cNvSpPr txBox="1"/>
+          <p:nvPr/>
+        </p:nvSpPr>
+        <p:spPr>
+          <a:xfrm>
+            <a:off x="0" y="746484"/>
+            <a:ext cx="7160935" cy="584775"/>
+          </a:xfrm>
+          <a:prstGeom prst="rect">
+            <a:avLst/>
+          </a:prstGeom>
+          <a:noFill/>
+        </p:spPr>
+        <p:txBody>
+          <a:bodyPr wrap="none" rtlCol="0">
+            <a:spAutoFit/>
+          </a:bodyPr>
+          <a:lstStyle/>
+          <a:p>
+            <a:r>
+              <a:rPr kumimoji="1" lang="ja-JP" altLang="en-US" sz="3200" dirty="0"/>
+              <a:t>灰玉：黄玉の常に動いてるバージョン</a:t>
+            </a:r>
+          </a:p>
+        </p:txBody>
+      </p:sp>
+      <p:pic>
+        <p:nvPicPr>
+          <p:cNvPr id="11" name="図 10">
+            <a:extLst>
+              <a:ext uri="{FF2B5EF4-FFF2-40B4-BE49-F238E27FC236}">
+                <a16:creationId xmlns:a16="http://schemas.microsoft.com/office/drawing/2014/main" id="{B71F3122-8FC1-490C-BDDC-FEF0A5128774}"/>
+              </a:ext>
+            </a:extLst>
+          </p:cNvPr>
+          <p:cNvPicPr>
+            <a:picLocks noChangeAspect="1"/>
+          </p:cNvPicPr>
+          <p:nvPr/>
+        </p:nvPicPr>
+        <p:blipFill>
+          <a:blip r:embed="rId2">
+            <a:extLst>
+              <a:ext uri="{28A0092B-C50C-407E-A947-70E740481C1C}">
+                <a14:useLocalDpi xmlns:a14="http://schemas.microsoft.com/office/drawing/2010/main" val="0"/>
+              </a:ext>
+            </a:extLst>
+          </a:blip>
+          <a:stretch>
+            <a:fillRect/>
+          </a:stretch>
+        </p:blipFill>
+        <p:spPr>
+          <a:xfrm>
+            <a:off x="-933" y="2077743"/>
+            <a:ext cx="839772" cy="858012"/>
+          </a:xfrm>
+          <a:prstGeom prst="rect">
+            <a:avLst/>
+          </a:prstGeom>
+        </p:spPr>
+      </p:pic>
+      <p:sp>
+        <p:nvSpPr>
+          <p:cNvPr id="30" name="楕円 29">
+            <a:extLst>
+              <a:ext uri="{FF2B5EF4-FFF2-40B4-BE49-F238E27FC236}">
+                <a16:creationId xmlns:a16="http://schemas.microsoft.com/office/drawing/2014/main" id="{C5F6CB56-8868-497F-93F1-711F8841B794}"/>
+              </a:ext>
+            </a:extLst>
+          </p:cNvPr>
+          <p:cNvSpPr/>
+          <p:nvPr/>
+        </p:nvSpPr>
+        <p:spPr>
+          <a:xfrm>
+            <a:off x="1273503" y="2414674"/>
+            <a:ext cx="203199" cy="184150"/>
+          </a:xfrm>
+          <a:prstGeom prst="ellipse">
+            <a:avLst/>
+          </a:prstGeom>
+        </p:spPr>
+        <p:style>
+          <a:lnRef idx="2">
+            <a:schemeClr val="accent1">
+              <a:shade val="50000"/>
+            </a:schemeClr>
+          </a:lnRef>
+          <a:fillRef idx="1">
+            <a:schemeClr val="accent1"/>
+          </a:fillRef>
+          <a:effectRef idx="0">
+            <a:schemeClr val="accent1"/>
+          </a:effectRef>
+          <a:fontRef idx="minor">
+            <a:schemeClr val="lt1"/>
+          </a:fontRef>
+        </p:style>
+        <p:txBody>
+          <a:bodyPr rtlCol="0" anchor="ctr"/>
+          <a:lstStyle/>
+          <a:p>
+            <a:pPr algn="ctr"/>
+            <a:endParaRPr kumimoji="1" lang="ja-JP" altLang="en-US"/>
+          </a:p>
+        </p:txBody>
+      </p:sp>
+      <p:sp>
+        <p:nvSpPr>
+          <p:cNvPr id="31" name="楕円 30">
+            <a:extLst>
+              <a:ext uri="{FF2B5EF4-FFF2-40B4-BE49-F238E27FC236}">
+                <a16:creationId xmlns:a16="http://schemas.microsoft.com/office/drawing/2014/main" id="{F2A21A83-9BAF-4C31-A220-AEA537AD065E}"/>
+              </a:ext>
+            </a:extLst>
+          </p:cNvPr>
+          <p:cNvSpPr/>
+          <p:nvPr/>
+        </p:nvSpPr>
+        <p:spPr>
+          <a:xfrm>
+            <a:off x="2330157" y="2414674"/>
+            <a:ext cx="203199" cy="184150"/>
+          </a:xfrm>
+          <a:prstGeom prst="ellipse">
+            <a:avLst/>
+          </a:prstGeom>
+        </p:spPr>
+        <p:style>
+          <a:lnRef idx="2">
+            <a:schemeClr val="accent1">
+              <a:shade val="50000"/>
+            </a:schemeClr>
+          </a:lnRef>
+          <a:fillRef idx="1">
+            <a:schemeClr val="accent1"/>
+          </a:fillRef>
+          <a:effectRef idx="0">
+            <a:schemeClr val="accent1"/>
+          </a:effectRef>
+          <a:fontRef idx="minor">
+            <a:schemeClr val="lt1"/>
+          </a:fontRef>
+        </p:style>
+        <p:txBody>
+          <a:bodyPr rtlCol="0" anchor="ctr"/>
+          <a:lstStyle/>
+          <a:p>
+            <a:pPr algn="ctr"/>
+            <a:endParaRPr kumimoji="1" lang="ja-JP" altLang="en-US"/>
+          </a:p>
+        </p:txBody>
+      </p:sp>
+      <p:sp>
+        <p:nvSpPr>
+          <p:cNvPr id="32" name="楕円 31">
+            <a:extLst>
+              <a:ext uri="{FF2B5EF4-FFF2-40B4-BE49-F238E27FC236}">
+                <a16:creationId xmlns:a16="http://schemas.microsoft.com/office/drawing/2014/main" id="{10A59AC7-A8CA-470D-9DF1-F5D3592433E1}"/>
+              </a:ext>
+            </a:extLst>
+          </p:cNvPr>
+          <p:cNvSpPr/>
+          <p:nvPr/>
+        </p:nvSpPr>
+        <p:spPr>
+          <a:xfrm>
+            <a:off x="3386811" y="2414674"/>
+            <a:ext cx="203199" cy="184150"/>
+          </a:xfrm>
+          <a:prstGeom prst="ellipse">
+            <a:avLst/>
+          </a:prstGeom>
+        </p:spPr>
+        <p:style>
+          <a:lnRef idx="2">
+            <a:schemeClr val="accent1">
+              <a:shade val="50000"/>
+            </a:schemeClr>
+          </a:lnRef>
+          <a:fillRef idx="1">
+            <a:schemeClr val="accent1"/>
+          </a:fillRef>
+          <a:effectRef idx="0">
+            <a:schemeClr val="accent1"/>
+          </a:effectRef>
+          <a:fontRef idx="minor">
+            <a:schemeClr val="lt1"/>
+          </a:fontRef>
+        </p:style>
+        <p:txBody>
+          <a:bodyPr rtlCol="0" anchor="ctr"/>
+          <a:lstStyle/>
+          <a:p>
+            <a:pPr algn="ctr"/>
+            <a:endParaRPr kumimoji="1" lang="ja-JP" altLang="en-US"/>
+          </a:p>
+        </p:txBody>
+      </p:sp>
+      <p:sp>
+        <p:nvSpPr>
+          <p:cNvPr id="33" name="楕円 32">
+            <a:extLst>
+              <a:ext uri="{FF2B5EF4-FFF2-40B4-BE49-F238E27FC236}">
+                <a16:creationId xmlns:a16="http://schemas.microsoft.com/office/drawing/2014/main" id="{4207C3E3-7BDC-4DC9-BB2E-DC2F4B70BD63}"/>
+              </a:ext>
+            </a:extLst>
+          </p:cNvPr>
+          <p:cNvSpPr/>
+          <p:nvPr/>
+        </p:nvSpPr>
+        <p:spPr>
+          <a:xfrm>
+            <a:off x="4443465" y="2414674"/>
+            <a:ext cx="203199" cy="184150"/>
+          </a:xfrm>
+          <a:prstGeom prst="ellipse">
+            <a:avLst/>
+          </a:prstGeom>
+        </p:spPr>
+        <p:style>
+          <a:lnRef idx="2">
+            <a:schemeClr val="accent1">
+              <a:shade val="50000"/>
+            </a:schemeClr>
+          </a:lnRef>
+          <a:fillRef idx="1">
+            <a:schemeClr val="accent1"/>
+          </a:fillRef>
+          <a:effectRef idx="0">
+            <a:schemeClr val="accent1"/>
+          </a:effectRef>
+          <a:fontRef idx="minor">
+            <a:schemeClr val="lt1"/>
+          </a:fontRef>
+        </p:style>
+        <p:txBody>
+          <a:bodyPr rtlCol="0" anchor="ctr"/>
+          <a:lstStyle/>
+          <a:p>
+            <a:pPr algn="ctr"/>
+            <a:endParaRPr kumimoji="1" lang="ja-JP" altLang="en-US"/>
+          </a:p>
+        </p:txBody>
+      </p:sp>
+      <p:sp>
+        <p:nvSpPr>
+          <p:cNvPr id="34" name="楕円 33">
+            <a:extLst>
+              <a:ext uri="{FF2B5EF4-FFF2-40B4-BE49-F238E27FC236}">
+                <a16:creationId xmlns:a16="http://schemas.microsoft.com/office/drawing/2014/main" id="{9E611DD0-4090-438D-A6B4-3C405EE8DE91}"/>
+              </a:ext>
+            </a:extLst>
+          </p:cNvPr>
+          <p:cNvSpPr/>
+          <p:nvPr/>
+        </p:nvSpPr>
+        <p:spPr>
+          <a:xfrm>
+            <a:off x="5500119" y="2414674"/>
+            <a:ext cx="203199" cy="184150"/>
+          </a:xfrm>
+          <a:prstGeom prst="ellipse">
+            <a:avLst/>
+          </a:prstGeom>
+        </p:spPr>
+        <p:style>
+          <a:lnRef idx="2">
+            <a:schemeClr val="accent1">
+              <a:shade val="50000"/>
+            </a:schemeClr>
+          </a:lnRef>
+          <a:fillRef idx="1">
+            <a:schemeClr val="accent1"/>
+          </a:fillRef>
+          <a:effectRef idx="0">
+            <a:schemeClr val="accent1"/>
+          </a:effectRef>
+          <a:fontRef idx="minor">
+            <a:schemeClr val="lt1"/>
+          </a:fontRef>
+        </p:style>
+        <p:txBody>
+          <a:bodyPr rtlCol="0" anchor="ctr"/>
+          <a:lstStyle/>
+          <a:p>
+            <a:pPr algn="ctr"/>
+            <a:endParaRPr kumimoji="1" lang="ja-JP" altLang="en-US"/>
+          </a:p>
+        </p:txBody>
+      </p:sp>
+      <p:pic>
+        <p:nvPicPr>
+          <p:cNvPr id="35" name="図 34">
+            <a:extLst>
+              <a:ext uri="{FF2B5EF4-FFF2-40B4-BE49-F238E27FC236}">
+                <a16:creationId xmlns:a16="http://schemas.microsoft.com/office/drawing/2014/main" id="{C1D2C8B1-33DF-4592-84FD-CC093A60B298}"/>
+              </a:ext>
+            </a:extLst>
+          </p:cNvPr>
+          <p:cNvPicPr>
+            <a:picLocks noChangeAspect="1"/>
+          </p:cNvPicPr>
+          <p:nvPr/>
+        </p:nvPicPr>
+        <p:blipFill>
+          <a:blip r:embed="rId2">
+            <a:extLst>
+              <a:ext uri="{28A0092B-C50C-407E-A947-70E740481C1C}">
+                <a14:useLocalDpi xmlns:a14="http://schemas.microsoft.com/office/drawing/2010/main" val="0"/>
+              </a:ext>
+            </a:extLst>
+          </a:blip>
+          <a:stretch>
+            <a:fillRect/>
+          </a:stretch>
+        </p:blipFill>
+        <p:spPr>
+          <a:xfrm>
+            <a:off x="3068524" y="3682239"/>
+            <a:ext cx="839772" cy="858012"/>
+          </a:xfrm>
+          <a:prstGeom prst="rect">
+            <a:avLst/>
+          </a:prstGeom>
+        </p:spPr>
+      </p:pic>
+      <p:pic>
+        <p:nvPicPr>
+          <p:cNvPr id="36" name="図 35">
+            <a:extLst>
+              <a:ext uri="{FF2B5EF4-FFF2-40B4-BE49-F238E27FC236}">
+                <a16:creationId xmlns:a16="http://schemas.microsoft.com/office/drawing/2014/main" id="{E46857FF-295D-4CE4-A08E-BB376271D880}"/>
+              </a:ext>
+            </a:extLst>
+          </p:cNvPr>
+          <p:cNvPicPr>
+            <a:picLocks noChangeAspect="1"/>
+          </p:cNvPicPr>
+          <p:nvPr/>
+        </p:nvPicPr>
+        <p:blipFill>
+          <a:blip r:embed="rId2">
+            <a:extLst>
+              <a:ext uri="{28A0092B-C50C-407E-A947-70E740481C1C}">
+                <a14:useLocalDpi xmlns:a14="http://schemas.microsoft.com/office/drawing/2010/main" val="0"/>
+              </a:ext>
+            </a:extLst>
+          </a:blip>
+          <a:stretch>
+            <a:fillRect/>
+          </a:stretch>
+        </p:blipFill>
+        <p:spPr>
+          <a:xfrm>
+            <a:off x="6321163" y="5372618"/>
+            <a:ext cx="839772" cy="858012"/>
+          </a:xfrm>
+          <a:prstGeom prst="rect">
+            <a:avLst/>
+          </a:prstGeom>
+        </p:spPr>
+      </p:pic>
+      <p:sp>
+        <p:nvSpPr>
+          <p:cNvPr id="37" name="楕円 36">
+            <a:extLst>
+              <a:ext uri="{FF2B5EF4-FFF2-40B4-BE49-F238E27FC236}">
+                <a16:creationId xmlns:a16="http://schemas.microsoft.com/office/drawing/2014/main" id="{EA7C57FE-9538-4C5B-819C-497EDE8CFC8B}"/>
+              </a:ext>
+            </a:extLst>
+          </p:cNvPr>
+          <p:cNvSpPr/>
+          <p:nvPr/>
+        </p:nvSpPr>
+        <p:spPr>
+          <a:xfrm>
+            <a:off x="1273503" y="4019170"/>
+            <a:ext cx="203199" cy="184150"/>
+          </a:xfrm>
+          <a:prstGeom prst="ellipse">
+            <a:avLst/>
+          </a:prstGeom>
+        </p:spPr>
+        <p:style>
+          <a:lnRef idx="2">
+            <a:schemeClr val="accent1">
+              <a:shade val="50000"/>
+            </a:schemeClr>
+          </a:lnRef>
+          <a:fillRef idx="1">
+            <a:schemeClr val="accent1"/>
+          </a:fillRef>
+          <a:effectRef idx="0">
+            <a:schemeClr val="accent1"/>
+          </a:effectRef>
+          <a:fontRef idx="minor">
+            <a:schemeClr val="lt1"/>
+          </a:fontRef>
+        </p:style>
+        <p:txBody>
+          <a:bodyPr rtlCol="0" anchor="ctr"/>
+          <a:lstStyle/>
+          <a:p>
+            <a:pPr algn="ctr"/>
+            <a:endParaRPr kumimoji="1" lang="ja-JP" altLang="en-US"/>
+          </a:p>
+        </p:txBody>
+      </p:sp>
+      <p:sp>
+        <p:nvSpPr>
+          <p:cNvPr id="38" name="楕円 37">
+            <a:extLst>
+              <a:ext uri="{FF2B5EF4-FFF2-40B4-BE49-F238E27FC236}">
+                <a16:creationId xmlns:a16="http://schemas.microsoft.com/office/drawing/2014/main" id="{B6B7D632-B1C2-470B-8DE8-E0F23791A4D5}"/>
+              </a:ext>
+            </a:extLst>
+          </p:cNvPr>
+          <p:cNvSpPr/>
+          <p:nvPr/>
+        </p:nvSpPr>
+        <p:spPr>
+          <a:xfrm>
+            <a:off x="2330157" y="4019170"/>
+            <a:ext cx="203199" cy="184150"/>
+          </a:xfrm>
+          <a:prstGeom prst="ellipse">
+            <a:avLst/>
+          </a:prstGeom>
+        </p:spPr>
+        <p:style>
+          <a:lnRef idx="2">
+            <a:schemeClr val="accent1">
+              <a:shade val="50000"/>
+            </a:schemeClr>
+          </a:lnRef>
+          <a:fillRef idx="1">
+            <a:schemeClr val="accent1"/>
+          </a:fillRef>
+          <a:effectRef idx="0">
+            <a:schemeClr val="accent1"/>
+          </a:effectRef>
+          <a:fontRef idx="minor">
+            <a:schemeClr val="lt1"/>
+          </a:fontRef>
+        </p:style>
+        <p:txBody>
+          <a:bodyPr rtlCol="0" anchor="ctr"/>
+          <a:lstStyle/>
+          <a:p>
+            <a:pPr algn="ctr"/>
+            <a:endParaRPr kumimoji="1" lang="ja-JP" altLang="en-US"/>
+          </a:p>
+        </p:txBody>
+      </p:sp>
+      <p:sp>
+        <p:nvSpPr>
+          <p:cNvPr id="39" name="楕円 38">
+            <a:extLst>
+              <a:ext uri="{FF2B5EF4-FFF2-40B4-BE49-F238E27FC236}">
+                <a16:creationId xmlns:a16="http://schemas.microsoft.com/office/drawing/2014/main" id="{413E6A76-4809-4059-9692-C2590F04D204}"/>
+              </a:ext>
+            </a:extLst>
+          </p:cNvPr>
+          <p:cNvSpPr/>
+          <p:nvPr/>
+        </p:nvSpPr>
+        <p:spPr>
+          <a:xfrm>
+            <a:off x="4443465" y="4019170"/>
+            <a:ext cx="203199" cy="184150"/>
+          </a:xfrm>
+          <a:prstGeom prst="ellipse">
+            <a:avLst/>
+          </a:prstGeom>
+        </p:spPr>
+        <p:style>
+          <a:lnRef idx="2">
+            <a:schemeClr val="accent1">
+              <a:shade val="50000"/>
+            </a:schemeClr>
+          </a:lnRef>
+          <a:fillRef idx="1">
+            <a:schemeClr val="accent1"/>
+          </a:fillRef>
+          <a:effectRef idx="0">
+            <a:schemeClr val="accent1"/>
+          </a:effectRef>
+          <a:fontRef idx="minor">
+            <a:schemeClr val="lt1"/>
+          </a:fontRef>
+        </p:style>
+        <p:txBody>
+          <a:bodyPr rtlCol="0" anchor="ctr"/>
+          <a:lstStyle/>
+          <a:p>
+            <a:pPr algn="ctr"/>
+            <a:endParaRPr kumimoji="1" lang="ja-JP" altLang="en-US"/>
+          </a:p>
+        </p:txBody>
+      </p:sp>
+      <p:sp>
+        <p:nvSpPr>
+          <p:cNvPr id="40" name="楕円 39">
+            <a:extLst>
+              <a:ext uri="{FF2B5EF4-FFF2-40B4-BE49-F238E27FC236}">
+                <a16:creationId xmlns:a16="http://schemas.microsoft.com/office/drawing/2014/main" id="{F7666C0C-649B-4AF4-A584-9FF513FFA667}"/>
+              </a:ext>
+            </a:extLst>
+          </p:cNvPr>
+          <p:cNvSpPr/>
+          <p:nvPr/>
+        </p:nvSpPr>
+        <p:spPr>
+          <a:xfrm>
+            <a:off x="5500118" y="4019170"/>
+            <a:ext cx="203199" cy="184150"/>
+          </a:xfrm>
+          <a:prstGeom prst="ellipse">
+            <a:avLst/>
+          </a:prstGeom>
+        </p:spPr>
+        <p:style>
+          <a:lnRef idx="2">
+            <a:schemeClr val="accent1">
+              <a:shade val="50000"/>
+            </a:schemeClr>
+          </a:lnRef>
+          <a:fillRef idx="1">
+            <a:schemeClr val="accent1"/>
+          </a:fillRef>
+          <a:effectRef idx="0">
+            <a:schemeClr val="accent1"/>
+          </a:effectRef>
+          <a:fontRef idx="minor">
+            <a:schemeClr val="lt1"/>
+          </a:fontRef>
+        </p:style>
+        <p:txBody>
+          <a:bodyPr rtlCol="0" anchor="ctr"/>
+          <a:lstStyle/>
+          <a:p>
+            <a:pPr algn="ctr"/>
+            <a:endParaRPr kumimoji="1" lang="ja-JP" altLang="en-US"/>
+          </a:p>
+        </p:txBody>
+      </p:sp>
+      <p:sp>
+        <p:nvSpPr>
+          <p:cNvPr id="41" name="楕円 40">
+            <a:extLst>
+              <a:ext uri="{FF2B5EF4-FFF2-40B4-BE49-F238E27FC236}">
+                <a16:creationId xmlns:a16="http://schemas.microsoft.com/office/drawing/2014/main" id="{2EF8AF32-07D1-49EE-B4A3-4C35D5BABDAE}"/>
+              </a:ext>
+            </a:extLst>
+          </p:cNvPr>
+          <p:cNvSpPr/>
+          <p:nvPr/>
+        </p:nvSpPr>
+        <p:spPr>
+          <a:xfrm>
+            <a:off x="1273502" y="5709549"/>
+            <a:ext cx="203199" cy="184150"/>
+          </a:xfrm>
+          <a:prstGeom prst="ellipse">
+            <a:avLst/>
+          </a:prstGeom>
+        </p:spPr>
+        <p:style>
+          <a:lnRef idx="2">
+            <a:schemeClr val="accent1">
+              <a:shade val="50000"/>
+            </a:schemeClr>
+          </a:lnRef>
+          <a:fillRef idx="1">
+            <a:schemeClr val="accent1"/>
+          </a:fillRef>
+          <a:effectRef idx="0">
+            <a:schemeClr val="accent1"/>
+          </a:effectRef>
+          <a:fontRef idx="minor">
+            <a:schemeClr val="lt1"/>
+          </a:fontRef>
+        </p:style>
+        <p:txBody>
+          <a:bodyPr rtlCol="0" anchor="ctr"/>
+          <a:lstStyle/>
+          <a:p>
+            <a:pPr algn="ctr"/>
+            <a:endParaRPr kumimoji="1" lang="ja-JP" altLang="en-US"/>
+          </a:p>
+        </p:txBody>
+      </p:sp>
+      <p:sp>
+        <p:nvSpPr>
+          <p:cNvPr id="42" name="楕円 41">
+            <a:extLst>
+              <a:ext uri="{FF2B5EF4-FFF2-40B4-BE49-F238E27FC236}">
+                <a16:creationId xmlns:a16="http://schemas.microsoft.com/office/drawing/2014/main" id="{26894802-8843-4AFA-A424-A7AD69FB6230}"/>
+              </a:ext>
+            </a:extLst>
+          </p:cNvPr>
+          <p:cNvSpPr/>
+          <p:nvPr/>
+        </p:nvSpPr>
+        <p:spPr>
+          <a:xfrm>
+            <a:off x="2330156" y="5709549"/>
+            <a:ext cx="203199" cy="184150"/>
+          </a:xfrm>
+          <a:prstGeom prst="ellipse">
+            <a:avLst/>
+          </a:prstGeom>
+        </p:spPr>
+        <p:style>
+          <a:lnRef idx="2">
+            <a:schemeClr val="accent1">
+              <a:shade val="50000"/>
+            </a:schemeClr>
+          </a:lnRef>
+          <a:fillRef idx="1">
+            <a:schemeClr val="accent1"/>
+          </a:fillRef>
+          <a:effectRef idx="0">
+            <a:schemeClr val="accent1"/>
+          </a:effectRef>
+          <a:fontRef idx="minor">
+            <a:schemeClr val="lt1"/>
+          </a:fontRef>
+        </p:style>
+        <p:txBody>
+          <a:bodyPr rtlCol="0" anchor="ctr"/>
+          <a:lstStyle/>
+          <a:p>
+            <a:pPr algn="ctr"/>
+            <a:endParaRPr kumimoji="1" lang="ja-JP" altLang="en-US"/>
+          </a:p>
+        </p:txBody>
+      </p:sp>
+      <p:sp>
+        <p:nvSpPr>
+          <p:cNvPr id="43" name="楕円 42">
+            <a:extLst>
+              <a:ext uri="{FF2B5EF4-FFF2-40B4-BE49-F238E27FC236}">
+                <a16:creationId xmlns:a16="http://schemas.microsoft.com/office/drawing/2014/main" id="{EED334EC-6E8C-4BF6-84BF-4E4CEDCADEAE}"/>
+              </a:ext>
+            </a:extLst>
+          </p:cNvPr>
+          <p:cNvSpPr/>
+          <p:nvPr/>
+        </p:nvSpPr>
+        <p:spPr>
+          <a:xfrm>
+            <a:off x="3386810" y="5709549"/>
+            <a:ext cx="203199" cy="184150"/>
+          </a:xfrm>
+          <a:prstGeom prst="ellipse">
+            <a:avLst/>
+          </a:prstGeom>
+        </p:spPr>
+        <p:style>
+          <a:lnRef idx="2">
+            <a:schemeClr val="accent1">
+              <a:shade val="50000"/>
+            </a:schemeClr>
+          </a:lnRef>
+          <a:fillRef idx="1">
+            <a:schemeClr val="accent1"/>
+          </a:fillRef>
+          <a:effectRef idx="0">
+            <a:schemeClr val="accent1"/>
+          </a:effectRef>
+          <a:fontRef idx="minor">
+            <a:schemeClr val="lt1"/>
+          </a:fontRef>
+        </p:style>
+        <p:txBody>
+          <a:bodyPr rtlCol="0" anchor="ctr"/>
+          <a:lstStyle/>
+          <a:p>
+            <a:pPr algn="ctr"/>
+            <a:endParaRPr kumimoji="1" lang="ja-JP" altLang="en-US"/>
+          </a:p>
+        </p:txBody>
+      </p:sp>
+      <p:sp>
+        <p:nvSpPr>
+          <p:cNvPr id="44" name="楕円 43">
+            <a:extLst>
+              <a:ext uri="{FF2B5EF4-FFF2-40B4-BE49-F238E27FC236}">
+                <a16:creationId xmlns:a16="http://schemas.microsoft.com/office/drawing/2014/main" id="{B3DD4FFE-0235-4122-8970-E72247F2F4A8}"/>
+              </a:ext>
+            </a:extLst>
+          </p:cNvPr>
+          <p:cNvSpPr/>
+          <p:nvPr/>
+        </p:nvSpPr>
+        <p:spPr>
+          <a:xfrm>
+            <a:off x="4443464" y="5709549"/>
+            <a:ext cx="203199" cy="184150"/>
+          </a:xfrm>
+          <a:prstGeom prst="ellipse">
+            <a:avLst/>
+          </a:prstGeom>
+        </p:spPr>
+        <p:style>
+          <a:lnRef idx="2">
+            <a:schemeClr val="accent1">
+              <a:shade val="50000"/>
+            </a:schemeClr>
+          </a:lnRef>
+          <a:fillRef idx="1">
+            <a:schemeClr val="accent1"/>
+          </a:fillRef>
+          <a:effectRef idx="0">
+            <a:schemeClr val="accent1"/>
+          </a:effectRef>
+          <a:fontRef idx="minor">
+            <a:schemeClr val="lt1"/>
+          </a:fontRef>
+        </p:style>
+        <p:txBody>
+          <a:bodyPr rtlCol="0" anchor="ctr"/>
+          <a:lstStyle/>
+          <a:p>
+            <a:pPr algn="ctr"/>
+            <a:endParaRPr kumimoji="1" lang="ja-JP" altLang="en-US"/>
+          </a:p>
+        </p:txBody>
+      </p:sp>
+      <p:sp>
+        <p:nvSpPr>
+          <p:cNvPr id="45" name="楕円 44">
+            <a:extLst>
+              <a:ext uri="{FF2B5EF4-FFF2-40B4-BE49-F238E27FC236}">
+                <a16:creationId xmlns:a16="http://schemas.microsoft.com/office/drawing/2014/main" id="{621CA585-E123-4090-9742-FE4EE845CBA4}"/>
+              </a:ext>
+            </a:extLst>
+          </p:cNvPr>
+          <p:cNvSpPr/>
+          <p:nvPr/>
+        </p:nvSpPr>
+        <p:spPr>
+          <a:xfrm>
+            <a:off x="5500118" y="5709549"/>
+            <a:ext cx="203199" cy="184150"/>
+          </a:xfrm>
+          <a:prstGeom prst="ellipse">
+            <a:avLst/>
+          </a:prstGeom>
+        </p:spPr>
+        <p:style>
+          <a:lnRef idx="2">
+            <a:schemeClr val="accent1">
+              <a:shade val="50000"/>
+            </a:schemeClr>
+          </a:lnRef>
+          <a:fillRef idx="1">
+            <a:schemeClr val="accent1"/>
+          </a:fillRef>
+          <a:effectRef idx="0">
+            <a:schemeClr val="accent1"/>
+          </a:effectRef>
+          <a:fontRef idx="minor">
+            <a:schemeClr val="lt1"/>
+          </a:fontRef>
+        </p:style>
+        <p:txBody>
+          <a:bodyPr rtlCol="0" anchor="ctr"/>
+          <a:lstStyle/>
+          <a:p>
+            <a:pPr algn="ctr"/>
+            <a:endParaRPr kumimoji="1" lang="ja-JP" altLang="en-US"/>
+          </a:p>
+        </p:txBody>
+      </p:sp>
+      <p:sp>
+        <p:nvSpPr>
+          <p:cNvPr id="46" name="矢印: 下 45">
+            <a:extLst>
+              <a:ext uri="{FF2B5EF4-FFF2-40B4-BE49-F238E27FC236}">
+                <a16:creationId xmlns:a16="http://schemas.microsoft.com/office/drawing/2014/main" id="{480F6430-5ED1-4625-8B6C-7D282BA63574}"/>
+              </a:ext>
+            </a:extLst>
+          </p:cNvPr>
+          <p:cNvSpPr/>
+          <p:nvPr/>
+        </p:nvSpPr>
+        <p:spPr>
+          <a:xfrm>
+            <a:off x="2990671" y="2929138"/>
+            <a:ext cx="995476" cy="493245"/>
+          </a:xfrm>
+          <a:prstGeom prst="downArrow">
+            <a:avLst/>
+          </a:prstGeom>
+        </p:spPr>
+        <p:style>
+          <a:lnRef idx="2">
+            <a:schemeClr val="accent1">
+              <a:shade val="50000"/>
+            </a:schemeClr>
+          </a:lnRef>
+          <a:fillRef idx="1">
+            <a:schemeClr val="accent1"/>
+          </a:fillRef>
+          <a:effectRef idx="0">
+            <a:schemeClr val="accent1"/>
+          </a:effectRef>
+          <a:fontRef idx="minor">
+            <a:schemeClr val="lt1"/>
+          </a:fontRef>
+        </p:style>
+        <p:txBody>
+          <a:bodyPr rtlCol="0" anchor="ctr"/>
+          <a:lstStyle/>
+          <a:p>
+            <a:pPr algn="ctr"/>
+            <a:endParaRPr kumimoji="1" lang="ja-JP" altLang="en-US"/>
+          </a:p>
+        </p:txBody>
+      </p:sp>
+      <p:sp>
+        <p:nvSpPr>
+          <p:cNvPr id="47" name="矢印: 下 46">
+            <a:extLst>
+              <a:ext uri="{FF2B5EF4-FFF2-40B4-BE49-F238E27FC236}">
+                <a16:creationId xmlns:a16="http://schemas.microsoft.com/office/drawing/2014/main" id="{837F08A1-AA21-4126-B0FC-A5F6167B1E4A}"/>
+              </a:ext>
+            </a:extLst>
+          </p:cNvPr>
+          <p:cNvSpPr/>
+          <p:nvPr/>
+        </p:nvSpPr>
+        <p:spPr>
+          <a:xfrm>
+            <a:off x="2990671" y="4879373"/>
+            <a:ext cx="995476" cy="493245"/>
+          </a:xfrm>
+          <a:prstGeom prst="downArrow">
+            <a:avLst/>
+          </a:prstGeom>
+        </p:spPr>
+        <p:style>
+          <a:lnRef idx="2">
+            <a:schemeClr val="accent1">
+              <a:shade val="50000"/>
+            </a:schemeClr>
+          </a:lnRef>
+          <a:fillRef idx="1">
+            <a:schemeClr val="accent1"/>
+          </a:fillRef>
+          <a:effectRef idx="0">
+            <a:schemeClr val="accent1"/>
+          </a:effectRef>
+          <a:fontRef idx="minor">
+            <a:schemeClr val="lt1"/>
+          </a:fontRef>
+        </p:style>
+        <p:txBody>
+          <a:bodyPr rtlCol="0" anchor="ctr"/>
+          <a:lstStyle/>
+          <a:p>
+            <a:pPr algn="ctr"/>
+            <a:endParaRPr kumimoji="1" lang="ja-JP" altLang="en-US"/>
+          </a:p>
+        </p:txBody>
+      </p:sp>
+    </p:spTree>
+    <p:extLst>
+      <p:ext uri="{BB962C8B-B14F-4D97-AF65-F5344CB8AC3E}">
+        <p14:creationId xmlns:p14="http://schemas.microsoft.com/office/powerpoint/2010/main" val="1093728645"/>
+      </p:ext>
+    </p:extLst>
+  </p:cSld>
+  <p:clrMapOvr>
+    <a:masterClrMapping/>
+  </p:clrMapOvr>
+</p:sld>
+</file>
+
+<file path=ppt/slides/slide3.xml><?xml version="1.0" encoding="utf-8"?>
+<p:sld xmlns:a="http://schemas.openxmlformats.org/drawingml/2006/main" xmlns:r="http://schemas.openxmlformats.org/officeDocument/2006/relationships" xmlns:p="http://schemas.openxmlformats.org/presentationml/2006/main">
+  <p:cSld>
+    <p:spTree>
+      <p:nvGrpSpPr>
+        <p:cNvPr id="1" name=""/>
+        <p:cNvGrpSpPr/>
+        <p:nvPr/>
+      </p:nvGrpSpPr>
+      <p:grpSpPr>
+        <a:xfrm>
+          <a:off x="0" y="0"/>
+          <a:ext cx="0" cy="0"/>
+          <a:chOff x="0" y="0"/>
+          <a:chExt cx="0" cy="0"/>
+        </a:xfrm>
+      </p:grpSpPr>
+      <p:sp>
+        <p:nvSpPr>
+          <p:cNvPr id="4" name="テキスト ボックス 3">
+            <a:extLst>
+              <a:ext uri="{FF2B5EF4-FFF2-40B4-BE49-F238E27FC236}">
+                <a16:creationId xmlns:a16="http://schemas.microsoft.com/office/drawing/2014/main" id="{BEF8D949-2859-4AE4-8B80-E1ED1DC80BAA}"/>
+              </a:ext>
+            </a:extLst>
+          </p:cNvPr>
+          <p:cNvSpPr txBox="1"/>
+          <p:nvPr/>
+        </p:nvSpPr>
+        <p:spPr>
+          <a:xfrm>
+            <a:off x="0" y="0"/>
+            <a:ext cx="8058150" cy="769441"/>
+          </a:xfrm>
+          <a:prstGeom prst="rect">
+            <a:avLst/>
+          </a:prstGeom>
+          <a:noFill/>
+        </p:spPr>
+        <p:txBody>
+          <a:bodyPr wrap="square" rtlCol="0">
+            <a:spAutoFit/>
+          </a:bodyPr>
+          <a:lstStyle/>
+          <a:p>
+            <a:r>
+              <a:rPr kumimoji="1" lang="ja-JP" altLang="en-US" sz="4400" dirty="0"/>
+              <a:t>ギミック：色玉</a:t>
+            </a:r>
+          </a:p>
+        </p:txBody>
+      </p:sp>
+      <p:sp>
+        <p:nvSpPr>
+          <p:cNvPr id="5" name="テキスト ボックス 4">
+            <a:extLst>
+              <a:ext uri="{FF2B5EF4-FFF2-40B4-BE49-F238E27FC236}">
+                <a16:creationId xmlns:a16="http://schemas.microsoft.com/office/drawing/2014/main" id="{DC92C62D-7EC9-41AF-B90D-6A810DA5AA5D}"/>
+              </a:ext>
+            </a:extLst>
+          </p:cNvPr>
+          <p:cNvSpPr txBox="1"/>
+          <p:nvPr/>
+        </p:nvSpPr>
+        <p:spPr>
+          <a:xfrm>
+            <a:off x="0" y="746484"/>
+            <a:ext cx="12020550" cy="1077218"/>
+          </a:xfrm>
+          <a:prstGeom prst="rect">
+            <a:avLst/>
+          </a:prstGeom>
+          <a:noFill/>
+        </p:spPr>
+        <p:txBody>
+          <a:bodyPr wrap="square" rtlCol="0">
+            <a:spAutoFit/>
+          </a:bodyPr>
+          <a:lstStyle/>
+          <a:p>
+            <a:r>
+              <a:rPr lang="ja-JP" altLang="en-US" sz="3200" dirty="0"/>
+              <a:t>緑</a:t>
+            </a:r>
+            <a:r>
+              <a:rPr kumimoji="1" lang="ja-JP" altLang="en-US" sz="3200" dirty="0"/>
+              <a:t>玉：ダッシュするとゴムのように少し前に出てしばらくたつともとに戻る</a:t>
+            </a:r>
+          </a:p>
+        </p:txBody>
+      </p:sp>
+      <p:pic>
+        <p:nvPicPr>
+          <p:cNvPr id="7" name="図 6">
+            <a:extLst>
+              <a:ext uri="{FF2B5EF4-FFF2-40B4-BE49-F238E27FC236}">
+                <a16:creationId xmlns:a16="http://schemas.microsoft.com/office/drawing/2014/main" id="{5282C280-7B4A-4ECE-B2CA-8D76C6CA543E}"/>
+              </a:ext>
+            </a:extLst>
+          </p:cNvPr>
+          <p:cNvPicPr>
+            <a:picLocks noChangeAspect="1"/>
+          </p:cNvPicPr>
+          <p:nvPr/>
+        </p:nvPicPr>
+        <p:blipFill>
+          <a:blip r:embed="rId2">
+            <a:extLst>
+              <a:ext uri="{28A0092B-C50C-407E-A947-70E740481C1C}">
+                <a14:useLocalDpi xmlns:a14="http://schemas.microsoft.com/office/drawing/2010/main" val="0"/>
+              </a:ext>
+            </a:extLst>
+          </a:blip>
+          <a:stretch>
+            <a:fillRect/>
+          </a:stretch>
+        </p:blipFill>
+        <p:spPr>
+          <a:xfrm>
+            <a:off x="2249226" y="2871188"/>
+            <a:ext cx="934212" cy="915162"/>
+          </a:xfrm>
+          <a:prstGeom prst="rect">
+            <a:avLst/>
+          </a:prstGeom>
+        </p:spPr>
+      </p:pic>
+      <p:pic>
+        <p:nvPicPr>
+          <p:cNvPr id="8" name="図 7">
+            <a:extLst>
+              <a:ext uri="{FF2B5EF4-FFF2-40B4-BE49-F238E27FC236}">
+                <a16:creationId xmlns:a16="http://schemas.microsoft.com/office/drawing/2014/main" id="{E69CB5F3-8527-4EA1-A2E3-5CAB61A3DAEF}"/>
+              </a:ext>
+            </a:extLst>
+          </p:cNvPr>
+          <p:cNvPicPr>
+            <a:picLocks noChangeAspect="1"/>
+          </p:cNvPicPr>
+          <p:nvPr/>
+        </p:nvPicPr>
+        <p:blipFill>
+          <a:blip r:embed="rId3">
+            <a:extLst>
+              <a:ext uri="{28A0092B-C50C-407E-A947-70E740481C1C}">
+                <a14:useLocalDpi xmlns:a14="http://schemas.microsoft.com/office/drawing/2010/main" val="0"/>
+              </a:ext>
+            </a:extLst>
+          </a:blip>
+          <a:stretch>
+            <a:fillRect/>
+          </a:stretch>
+        </p:blipFill>
+        <p:spPr>
+          <a:xfrm>
+            <a:off x="0" y="2871188"/>
+            <a:ext cx="2249226" cy="2022932"/>
+          </a:xfrm>
+          <a:prstGeom prst="rect">
+            <a:avLst/>
+          </a:prstGeom>
+        </p:spPr>
+      </p:pic>
+      <p:sp>
+        <p:nvSpPr>
+          <p:cNvPr id="9" name="楕円 8">
+            <a:extLst>
+              <a:ext uri="{FF2B5EF4-FFF2-40B4-BE49-F238E27FC236}">
+                <a16:creationId xmlns:a16="http://schemas.microsoft.com/office/drawing/2014/main" id="{1CBCA55E-74F4-41D1-B1B4-7583C1DC0045}"/>
+              </a:ext>
+            </a:extLst>
+          </p:cNvPr>
+          <p:cNvSpPr/>
+          <p:nvPr/>
+        </p:nvSpPr>
+        <p:spPr>
+          <a:xfrm>
+            <a:off x="4398458" y="3352800"/>
+            <a:ext cx="152400" cy="174996"/>
+          </a:xfrm>
+          <a:prstGeom prst="ellipse">
+            <a:avLst/>
+          </a:prstGeom>
+        </p:spPr>
+        <p:style>
+          <a:lnRef idx="2">
+            <a:schemeClr val="accent1">
+              <a:shade val="50000"/>
+            </a:schemeClr>
+          </a:lnRef>
+          <a:fillRef idx="1">
+            <a:schemeClr val="accent1"/>
+          </a:fillRef>
+          <a:effectRef idx="0">
+            <a:schemeClr val="accent1"/>
+          </a:effectRef>
+          <a:fontRef idx="minor">
+            <a:schemeClr val="lt1"/>
+          </a:fontRef>
+        </p:style>
+        <p:txBody>
+          <a:bodyPr rtlCol="0" anchor="ctr"/>
+          <a:lstStyle/>
+          <a:p>
+            <a:pPr algn="ctr"/>
+            <a:endParaRPr kumimoji="1" lang="ja-JP" altLang="en-US"/>
+          </a:p>
+        </p:txBody>
+      </p:sp>
+      <p:sp>
+        <p:nvSpPr>
+          <p:cNvPr id="10" name="楕円 9">
+            <a:extLst>
+              <a:ext uri="{FF2B5EF4-FFF2-40B4-BE49-F238E27FC236}">
+                <a16:creationId xmlns:a16="http://schemas.microsoft.com/office/drawing/2014/main" id="{7094E92C-33FB-4765-8D0C-AB0B6B875FCD}"/>
+              </a:ext>
+            </a:extLst>
+          </p:cNvPr>
+          <p:cNvSpPr/>
+          <p:nvPr/>
+        </p:nvSpPr>
+        <p:spPr>
+          <a:xfrm>
+            <a:off x="4973029" y="3352800"/>
+            <a:ext cx="152400" cy="174996"/>
+          </a:xfrm>
+          <a:prstGeom prst="ellipse">
+            <a:avLst/>
+          </a:prstGeom>
+        </p:spPr>
+        <p:style>
+          <a:lnRef idx="2">
+            <a:schemeClr val="accent1">
+              <a:shade val="50000"/>
+            </a:schemeClr>
+          </a:lnRef>
+          <a:fillRef idx="1">
+            <a:schemeClr val="accent1"/>
+          </a:fillRef>
+          <a:effectRef idx="0">
+            <a:schemeClr val="accent1"/>
+          </a:effectRef>
+          <a:fontRef idx="minor">
+            <a:schemeClr val="lt1"/>
+          </a:fontRef>
+        </p:style>
+        <p:txBody>
+          <a:bodyPr rtlCol="0" anchor="ctr"/>
+          <a:lstStyle/>
+          <a:p>
+            <a:pPr algn="ctr"/>
+            <a:endParaRPr kumimoji="1" lang="ja-JP" altLang="en-US" dirty="0"/>
+          </a:p>
+        </p:txBody>
+      </p:sp>
+      <p:sp>
+        <p:nvSpPr>
+          <p:cNvPr id="11" name="楕円 10">
+            <a:extLst>
+              <a:ext uri="{FF2B5EF4-FFF2-40B4-BE49-F238E27FC236}">
+                <a16:creationId xmlns:a16="http://schemas.microsoft.com/office/drawing/2014/main" id="{228737B4-974A-45CA-9D22-437A27C2F91A}"/>
+              </a:ext>
+            </a:extLst>
+          </p:cNvPr>
+          <p:cNvSpPr/>
+          <p:nvPr/>
+        </p:nvSpPr>
+        <p:spPr>
+          <a:xfrm>
+            <a:off x="5547600" y="3352800"/>
+            <a:ext cx="152400" cy="174996"/>
+          </a:xfrm>
+          <a:prstGeom prst="ellipse">
+            <a:avLst/>
+          </a:prstGeom>
+        </p:spPr>
+        <p:style>
+          <a:lnRef idx="2">
+            <a:schemeClr val="accent1">
+              <a:shade val="50000"/>
+            </a:schemeClr>
+          </a:lnRef>
+          <a:fillRef idx="1">
+            <a:schemeClr val="accent1"/>
+          </a:fillRef>
+          <a:effectRef idx="0">
+            <a:schemeClr val="accent1"/>
+          </a:effectRef>
+          <a:fontRef idx="minor">
+            <a:schemeClr val="lt1"/>
+          </a:fontRef>
+        </p:style>
+        <p:txBody>
+          <a:bodyPr rtlCol="0" anchor="ctr"/>
+          <a:lstStyle/>
+          <a:p>
+            <a:pPr algn="ctr"/>
+            <a:endParaRPr kumimoji="1" lang="ja-JP" altLang="en-US" dirty="0"/>
+          </a:p>
+        </p:txBody>
+      </p:sp>
+      <p:sp>
+        <p:nvSpPr>
+          <p:cNvPr id="12" name="楕円 11">
+            <a:extLst>
+              <a:ext uri="{FF2B5EF4-FFF2-40B4-BE49-F238E27FC236}">
+                <a16:creationId xmlns:a16="http://schemas.microsoft.com/office/drawing/2014/main" id="{7659BA62-F082-4882-8B22-9616B00EA4A9}"/>
+              </a:ext>
+            </a:extLst>
+          </p:cNvPr>
+          <p:cNvSpPr/>
+          <p:nvPr/>
+        </p:nvSpPr>
+        <p:spPr>
+          <a:xfrm>
+            <a:off x="6117846" y="3352800"/>
+            <a:ext cx="152400" cy="174996"/>
+          </a:xfrm>
+          <a:prstGeom prst="ellipse">
+            <a:avLst/>
+          </a:prstGeom>
+        </p:spPr>
+        <p:style>
+          <a:lnRef idx="2">
+            <a:schemeClr val="accent1">
+              <a:shade val="50000"/>
+            </a:schemeClr>
+          </a:lnRef>
+          <a:fillRef idx="1">
+            <a:schemeClr val="accent1"/>
+          </a:fillRef>
+          <a:effectRef idx="0">
+            <a:schemeClr val="accent1"/>
+          </a:effectRef>
+          <a:fontRef idx="minor">
+            <a:schemeClr val="lt1"/>
+          </a:fontRef>
+        </p:style>
+        <p:txBody>
+          <a:bodyPr rtlCol="0" anchor="ctr"/>
+          <a:lstStyle/>
+          <a:p>
+            <a:pPr algn="ctr"/>
+            <a:endParaRPr kumimoji="1" lang="ja-JP" altLang="en-US" dirty="0"/>
+          </a:p>
+        </p:txBody>
+      </p:sp>
+      <p:pic>
+        <p:nvPicPr>
+          <p:cNvPr id="14" name="図 13">
+            <a:extLst>
+              <a:ext uri="{FF2B5EF4-FFF2-40B4-BE49-F238E27FC236}">
+                <a16:creationId xmlns:a16="http://schemas.microsoft.com/office/drawing/2014/main" id="{7097B832-FA2B-4AE7-A761-4F08964463BF}"/>
+              </a:ext>
+            </a:extLst>
+          </p:cNvPr>
+          <p:cNvPicPr>
+            <a:picLocks noChangeAspect="1"/>
+          </p:cNvPicPr>
+          <p:nvPr/>
+        </p:nvPicPr>
+        <p:blipFill>
+          <a:blip r:embed="rId4">
+            <a:extLst>
+              <a:ext uri="{28A0092B-C50C-407E-A947-70E740481C1C}">
+                <a14:useLocalDpi xmlns:a14="http://schemas.microsoft.com/office/drawing/2010/main" val="0"/>
+              </a:ext>
+            </a:extLst>
+          </a:blip>
+          <a:stretch>
+            <a:fillRect/>
+          </a:stretch>
+        </p:blipFill>
+        <p:spPr>
+          <a:xfrm>
+            <a:off x="6388244" y="2971419"/>
+            <a:ext cx="934212" cy="915162"/>
+          </a:xfrm>
+          <a:prstGeom prst="rect">
+            <a:avLst/>
+          </a:prstGeom>
+        </p:spPr>
+      </p:pic>
+      <p:pic>
+        <p:nvPicPr>
+          <p:cNvPr id="16" name="図 15">
+            <a:extLst>
+              <a:ext uri="{FF2B5EF4-FFF2-40B4-BE49-F238E27FC236}">
+                <a16:creationId xmlns:a16="http://schemas.microsoft.com/office/drawing/2014/main" id="{D3ABAD15-FC7C-4A8D-AEC6-84D21463A3EC}"/>
+              </a:ext>
+            </a:extLst>
+          </p:cNvPr>
+          <p:cNvPicPr>
+            <a:picLocks noChangeAspect="1"/>
+          </p:cNvPicPr>
+          <p:nvPr/>
+        </p:nvPicPr>
+        <p:blipFill>
+          <a:blip r:embed="rId5">
+            <a:extLst>
+              <a:ext uri="{28A0092B-C50C-407E-A947-70E740481C1C}">
+                <a14:useLocalDpi xmlns:a14="http://schemas.microsoft.com/office/drawing/2010/main" val="0"/>
+              </a:ext>
+            </a:extLst>
+          </a:blip>
+          <a:stretch>
+            <a:fillRect/>
+          </a:stretch>
+        </p:blipFill>
+        <p:spPr>
+          <a:xfrm>
+            <a:off x="4656343" y="2054449"/>
+            <a:ext cx="3463801" cy="3463801"/>
+          </a:xfrm>
+          <a:prstGeom prst="rect">
+            <a:avLst/>
+          </a:prstGeom>
+        </p:spPr>
+      </p:pic>
+      <p:sp>
+        <p:nvSpPr>
+          <p:cNvPr id="19" name="楕円 18">
+            <a:extLst>
+              <a:ext uri="{FF2B5EF4-FFF2-40B4-BE49-F238E27FC236}">
+                <a16:creationId xmlns:a16="http://schemas.microsoft.com/office/drawing/2014/main" id="{71127B35-07DF-4364-8E52-C39E72078975}"/>
+              </a:ext>
+            </a:extLst>
+          </p:cNvPr>
+          <p:cNvSpPr/>
+          <p:nvPr/>
+        </p:nvSpPr>
+        <p:spPr>
+          <a:xfrm>
+            <a:off x="3913550" y="2982717"/>
+            <a:ext cx="901136" cy="915162"/>
+          </a:xfrm>
+          <a:prstGeom prst="ellipse">
+            <a:avLst/>
+          </a:prstGeom>
+          <a:solidFill>
+            <a:schemeClr val="accent6">
+              <a:alpha val="34000"/>
+            </a:schemeClr>
+          </a:solidFill>
+          <a:ln>
+            <a:noFill/>
+          </a:ln>
+        </p:spPr>
+        <p:style>
+          <a:lnRef idx="2">
+            <a:schemeClr val="accent1">
+              <a:shade val="50000"/>
+            </a:schemeClr>
+          </a:lnRef>
+          <a:fillRef idx="1">
+            <a:schemeClr val="accent1"/>
+          </a:fillRef>
+          <a:effectRef idx="0">
+            <a:schemeClr val="accent1"/>
+          </a:effectRef>
+          <a:fontRef idx="minor">
+            <a:schemeClr val="lt1"/>
+          </a:fontRef>
+        </p:style>
+        <p:txBody>
+          <a:bodyPr rtlCol="0" anchor="ctr"/>
+          <a:lstStyle/>
+          <a:p>
+            <a:pPr algn="ctr"/>
+            <a:endParaRPr kumimoji="1" lang="ja-JP" altLang="en-US"/>
+          </a:p>
+        </p:txBody>
+      </p:sp>
+      <p:sp>
+        <p:nvSpPr>
+          <p:cNvPr id="20" name="テキスト ボックス 19">
+            <a:extLst>
+              <a:ext uri="{FF2B5EF4-FFF2-40B4-BE49-F238E27FC236}">
+                <a16:creationId xmlns:a16="http://schemas.microsoft.com/office/drawing/2014/main" id="{5AE11E68-8DFF-4D19-83C5-91C48AC11A90}"/>
+              </a:ext>
+            </a:extLst>
+          </p:cNvPr>
+          <p:cNvSpPr txBox="1"/>
+          <p:nvPr/>
+        </p:nvSpPr>
+        <p:spPr>
+          <a:xfrm>
+            <a:off x="4152033" y="2569074"/>
+            <a:ext cx="1933688" cy="369332"/>
+          </a:xfrm>
+          <a:prstGeom prst="rect">
+            <a:avLst/>
+          </a:prstGeom>
+          <a:noFill/>
+        </p:spPr>
+        <p:txBody>
+          <a:bodyPr wrap="square" rtlCol="0">
+            <a:spAutoFit/>
+          </a:bodyPr>
+          <a:lstStyle/>
+          <a:p>
+            <a:r>
+              <a:rPr kumimoji="1" lang="ja-JP" altLang="en-US" dirty="0"/>
+              <a:t>↓元あった場所</a:t>
+            </a:r>
+            <a:endParaRPr kumimoji="1" lang="en-US" altLang="ja-JP" dirty="0"/>
+          </a:p>
+        </p:txBody>
+      </p:sp>
+      <p:pic>
+        <p:nvPicPr>
+          <p:cNvPr id="22" name="図 21">
+            <a:extLst>
+              <a:ext uri="{FF2B5EF4-FFF2-40B4-BE49-F238E27FC236}">
+                <a16:creationId xmlns:a16="http://schemas.microsoft.com/office/drawing/2014/main" id="{C350F621-7035-42A0-9967-573492D29C91}"/>
+              </a:ext>
+            </a:extLst>
+          </p:cNvPr>
+          <p:cNvPicPr>
+            <a:picLocks noChangeAspect="1"/>
+          </p:cNvPicPr>
+          <p:nvPr/>
+        </p:nvPicPr>
+        <p:blipFill>
+          <a:blip r:embed="rId4">
+            <a:extLst>
+              <a:ext uri="{28A0092B-C50C-407E-A947-70E740481C1C}">
+                <a14:useLocalDpi xmlns:a14="http://schemas.microsoft.com/office/drawing/2010/main" val="0"/>
+              </a:ext>
+            </a:extLst>
+          </a:blip>
+          <a:stretch>
+            <a:fillRect/>
+          </a:stretch>
+        </p:blipFill>
+        <p:spPr>
+          <a:xfrm>
+            <a:off x="9672007" y="2982718"/>
+            <a:ext cx="934212" cy="915162"/>
+          </a:xfrm>
+          <a:prstGeom prst="rect">
+            <a:avLst/>
+          </a:prstGeom>
+        </p:spPr>
+      </p:pic>
+      <p:pic>
+        <p:nvPicPr>
+          <p:cNvPr id="21" name="図 20">
+            <a:extLst>
+              <a:ext uri="{FF2B5EF4-FFF2-40B4-BE49-F238E27FC236}">
+                <a16:creationId xmlns:a16="http://schemas.microsoft.com/office/drawing/2014/main" id="{E22EDA30-D7AB-4A3B-9191-E4BE34F16024}"/>
+              </a:ext>
+            </a:extLst>
+          </p:cNvPr>
+          <p:cNvPicPr>
+            <a:picLocks noChangeAspect="1"/>
+          </p:cNvPicPr>
+          <p:nvPr/>
+        </p:nvPicPr>
+        <p:blipFill>
+          <a:blip r:embed="rId5">
+            <a:extLst>
+              <a:ext uri="{28A0092B-C50C-407E-A947-70E740481C1C}">
+                <a14:useLocalDpi xmlns:a14="http://schemas.microsoft.com/office/drawing/2010/main" val="0"/>
+              </a:ext>
+            </a:extLst>
+          </a:blip>
+          <a:stretch>
+            <a:fillRect/>
+          </a:stretch>
+        </p:blipFill>
+        <p:spPr>
+          <a:xfrm>
+            <a:off x="8049551" y="2054449"/>
+            <a:ext cx="3463801" cy="3463801"/>
           </a:xfrm>
           <a:prstGeom prst="rect">
             <a:avLst/>
@@ -3753,7 +5863,1118 @@
     </p:spTree>
     <p:extLst>
       <p:ext uri="{BB962C8B-B14F-4D97-AF65-F5344CB8AC3E}">
+        <p14:creationId xmlns:p14="http://schemas.microsoft.com/office/powerpoint/2010/main" val="621087612"/>
+      </p:ext>
+    </p:extLst>
+  </p:cSld>
+  <p:clrMapOvr>
+    <a:masterClrMapping/>
+  </p:clrMapOvr>
+</p:sld>
+</file>
+
+<file path=ppt/slides/slide4.xml><?xml version="1.0" encoding="utf-8"?>
+<p:sld xmlns:a="http://schemas.openxmlformats.org/drawingml/2006/main" xmlns:r="http://schemas.openxmlformats.org/officeDocument/2006/relationships" xmlns:p="http://schemas.openxmlformats.org/presentationml/2006/main">
+  <p:cSld>
+    <p:spTree>
+      <p:nvGrpSpPr>
+        <p:cNvPr id="1" name=""/>
+        <p:cNvGrpSpPr/>
+        <p:nvPr/>
+      </p:nvGrpSpPr>
+      <p:grpSpPr>
+        <a:xfrm>
+          <a:off x="0" y="0"/>
+          <a:ext cx="0" cy="0"/>
+          <a:chOff x="0" y="0"/>
+          <a:chExt cx="0" cy="0"/>
+        </a:xfrm>
+      </p:grpSpPr>
+      <p:sp>
+        <p:nvSpPr>
+          <p:cNvPr id="4" name="テキスト ボックス 3">
+            <a:extLst>
+              <a:ext uri="{FF2B5EF4-FFF2-40B4-BE49-F238E27FC236}">
+                <a16:creationId xmlns:a16="http://schemas.microsoft.com/office/drawing/2014/main" id="{FEF63240-3663-4130-9CE1-908388D4C1CA}"/>
+              </a:ext>
+            </a:extLst>
+          </p:cNvPr>
+          <p:cNvSpPr txBox="1"/>
+          <p:nvPr/>
+        </p:nvSpPr>
+        <p:spPr>
+          <a:xfrm>
+            <a:off x="0" y="0"/>
+            <a:ext cx="8058150" cy="769441"/>
+          </a:xfrm>
+          <a:prstGeom prst="rect">
+            <a:avLst/>
+          </a:prstGeom>
+          <a:noFill/>
+        </p:spPr>
+        <p:txBody>
+          <a:bodyPr wrap="square" rtlCol="0">
+            <a:spAutoFit/>
+          </a:bodyPr>
+          <a:lstStyle/>
+          <a:p>
+            <a:r>
+              <a:rPr kumimoji="1" lang="ja-JP" altLang="en-US" sz="4400" dirty="0"/>
+              <a:t>ギミック：色玉</a:t>
+            </a:r>
+          </a:p>
+        </p:txBody>
+      </p:sp>
+      <p:sp>
+        <p:nvSpPr>
+          <p:cNvPr id="6" name="テキスト ボックス 5">
+            <a:extLst>
+              <a:ext uri="{FF2B5EF4-FFF2-40B4-BE49-F238E27FC236}">
+                <a16:creationId xmlns:a16="http://schemas.microsoft.com/office/drawing/2014/main" id="{F17ECB5D-02B4-41EA-9642-5792D47FBCEE}"/>
+              </a:ext>
+            </a:extLst>
+          </p:cNvPr>
+          <p:cNvSpPr txBox="1"/>
+          <p:nvPr/>
+        </p:nvSpPr>
+        <p:spPr>
+          <a:xfrm>
+            <a:off x="0" y="746484"/>
+            <a:ext cx="4288353" cy="584775"/>
+          </a:xfrm>
+          <a:prstGeom prst="rect">
+            <a:avLst/>
+          </a:prstGeom>
+          <a:noFill/>
+        </p:spPr>
+        <p:txBody>
+          <a:bodyPr wrap="none" rtlCol="0">
+            <a:spAutoFit/>
+          </a:bodyPr>
+          <a:lstStyle/>
+          <a:p>
+            <a:r>
+              <a:rPr kumimoji="1" lang="ja-JP" altLang="en-US" sz="3200" dirty="0"/>
+              <a:t>青玉：スタミナが回復</a:t>
+            </a:r>
+          </a:p>
+        </p:txBody>
+      </p:sp>
+      <p:pic>
+        <p:nvPicPr>
+          <p:cNvPr id="8" name="図 7">
+            <a:extLst>
+              <a:ext uri="{FF2B5EF4-FFF2-40B4-BE49-F238E27FC236}">
+                <a16:creationId xmlns:a16="http://schemas.microsoft.com/office/drawing/2014/main" id="{69F8786D-BA83-4B21-B783-1C67E7E02ECF}"/>
+              </a:ext>
+            </a:extLst>
+          </p:cNvPr>
+          <p:cNvPicPr>
+            <a:picLocks noChangeAspect="1"/>
+          </p:cNvPicPr>
+          <p:nvPr/>
+        </p:nvPicPr>
+        <p:blipFill>
+          <a:blip r:embed="rId2">
+            <a:extLst>
+              <a:ext uri="{28A0092B-C50C-407E-A947-70E740481C1C}">
+                <a14:useLocalDpi xmlns:a14="http://schemas.microsoft.com/office/drawing/2010/main" val="0"/>
+              </a:ext>
+            </a:extLst>
+          </a:blip>
+          <a:stretch>
+            <a:fillRect/>
+          </a:stretch>
+        </p:blipFill>
+        <p:spPr>
+          <a:xfrm>
+            <a:off x="90648" y="2967492"/>
+            <a:ext cx="2249226" cy="2022932"/>
+          </a:xfrm>
+          <a:prstGeom prst="rect">
+            <a:avLst/>
+          </a:prstGeom>
+        </p:spPr>
+      </p:pic>
+      <p:pic>
+        <p:nvPicPr>
+          <p:cNvPr id="10" name="図 9">
+            <a:extLst>
+              <a:ext uri="{FF2B5EF4-FFF2-40B4-BE49-F238E27FC236}">
+                <a16:creationId xmlns:a16="http://schemas.microsoft.com/office/drawing/2014/main" id="{2F26596D-04B4-4C73-9AF5-7D3CA76533B2}"/>
+              </a:ext>
+            </a:extLst>
+          </p:cNvPr>
+          <p:cNvPicPr>
+            <a:picLocks noChangeAspect="1"/>
+          </p:cNvPicPr>
+          <p:nvPr/>
+        </p:nvPicPr>
+        <p:blipFill>
+          <a:blip r:embed="rId3">
+            <a:extLst>
+              <a:ext uri="{28A0092B-C50C-407E-A947-70E740481C1C}">
+                <a14:useLocalDpi xmlns:a14="http://schemas.microsoft.com/office/drawing/2010/main" val="0"/>
+              </a:ext>
+            </a:extLst>
+          </a:blip>
+          <a:stretch>
+            <a:fillRect/>
+          </a:stretch>
+        </p:blipFill>
+        <p:spPr>
+          <a:xfrm>
+            <a:off x="2746906" y="2945757"/>
+            <a:ext cx="733425" cy="735341"/>
+          </a:xfrm>
+          <a:prstGeom prst="rect">
+            <a:avLst/>
+          </a:prstGeom>
+        </p:spPr>
+      </p:pic>
+      <p:pic>
+        <p:nvPicPr>
+          <p:cNvPr id="12" name="図 11">
+            <a:extLst>
+              <a:ext uri="{FF2B5EF4-FFF2-40B4-BE49-F238E27FC236}">
+                <a16:creationId xmlns:a16="http://schemas.microsoft.com/office/drawing/2014/main" id="{2D295337-2D2D-4335-BF7E-4C7A8C4C8185}"/>
+              </a:ext>
+            </a:extLst>
+          </p:cNvPr>
+          <p:cNvPicPr>
+            <a:picLocks noChangeAspect="1"/>
+          </p:cNvPicPr>
+          <p:nvPr/>
+        </p:nvPicPr>
+        <p:blipFill>
+          <a:blip r:embed="rId4">
+            <a:extLst>
+              <a:ext uri="{28A0092B-C50C-407E-A947-70E740481C1C}">
+                <a14:useLocalDpi xmlns:a14="http://schemas.microsoft.com/office/drawing/2010/main" val="0"/>
+              </a:ext>
+            </a:extLst>
+          </a:blip>
+          <a:stretch>
+            <a:fillRect/>
+          </a:stretch>
+        </p:blipFill>
+        <p:spPr>
+          <a:xfrm>
+            <a:off x="4201267" y="2075543"/>
+            <a:ext cx="3122304" cy="3122304"/>
+          </a:xfrm>
+          <a:prstGeom prst="rect">
+            <a:avLst/>
+          </a:prstGeom>
+        </p:spPr>
+      </p:pic>
+      <p:sp>
+        <p:nvSpPr>
+          <p:cNvPr id="13" name="テキスト ボックス 12">
+            <a:extLst>
+              <a:ext uri="{FF2B5EF4-FFF2-40B4-BE49-F238E27FC236}">
+                <a16:creationId xmlns:a16="http://schemas.microsoft.com/office/drawing/2014/main" id="{0641787B-68D0-41D4-86A1-F5029C95F234}"/>
+              </a:ext>
+            </a:extLst>
+          </p:cNvPr>
+          <p:cNvSpPr txBox="1"/>
+          <p:nvPr/>
+        </p:nvSpPr>
+        <p:spPr>
+          <a:xfrm>
+            <a:off x="4480250" y="4524958"/>
+            <a:ext cx="2564338" cy="923330"/>
+          </a:xfrm>
+          <a:prstGeom prst="rect">
+            <a:avLst/>
+          </a:prstGeom>
+          <a:noFill/>
+        </p:spPr>
+        <p:txBody>
+          <a:bodyPr wrap="square" rtlCol="0">
+            <a:spAutoFit/>
+          </a:bodyPr>
+          <a:lstStyle/>
+          <a:p>
+            <a:r>
+              <a:rPr kumimoji="1" lang="ja-JP" altLang="en-US" dirty="0"/>
+              <a:t>青玉を獲得するとその場でもう一度ダッシュすることができる</a:t>
+            </a:r>
+          </a:p>
+        </p:txBody>
+      </p:sp>
+      <p:sp>
+        <p:nvSpPr>
+          <p:cNvPr id="14" name="テキスト ボックス 13">
+            <a:extLst>
+              <a:ext uri="{FF2B5EF4-FFF2-40B4-BE49-F238E27FC236}">
+                <a16:creationId xmlns:a16="http://schemas.microsoft.com/office/drawing/2014/main" id="{4052889D-3DD0-492E-889F-C39AEFC72759}"/>
+              </a:ext>
+            </a:extLst>
+          </p:cNvPr>
+          <p:cNvSpPr txBox="1"/>
+          <p:nvPr/>
+        </p:nvSpPr>
+        <p:spPr>
+          <a:xfrm>
+            <a:off x="0" y="1331259"/>
+            <a:ext cx="4339650" cy="369332"/>
+          </a:xfrm>
+          <a:prstGeom prst="rect">
+            <a:avLst/>
+          </a:prstGeom>
+          <a:noFill/>
+        </p:spPr>
+        <p:txBody>
+          <a:bodyPr wrap="none" rtlCol="0">
+            <a:spAutoFit/>
+          </a:bodyPr>
+          <a:lstStyle/>
+          <a:p>
+            <a:r>
+              <a:rPr kumimoji="1" lang="ja-JP" altLang="en-US" dirty="0"/>
+              <a:t>青玉のみダッシュしなくても獲得できる</a:t>
+            </a:r>
+          </a:p>
+        </p:txBody>
+      </p:sp>
+      <p:pic>
+        <p:nvPicPr>
+          <p:cNvPr id="15" name="図 14">
+            <a:extLst>
+              <a:ext uri="{FF2B5EF4-FFF2-40B4-BE49-F238E27FC236}">
+                <a16:creationId xmlns:a16="http://schemas.microsoft.com/office/drawing/2014/main" id="{38EEA9FB-FAB2-496D-8333-E35BFE52121A}"/>
+              </a:ext>
+            </a:extLst>
+          </p:cNvPr>
+          <p:cNvPicPr>
+            <a:picLocks noChangeAspect="1"/>
+          </p:cNvPicPr>
+          <p:nvPr/>
+        </p:nvPicPr>
+        <p:blipFill>
+          <a:blip r:embed="rId2">
+            <a:extLst>
+              <a:ext uri="{28A0092B-C50C-407E-A947-70E740481C1C}">
+                <a14:useLocalDpi xmlns:a14="http://schemas.microsoft.com/office/drawing/2010/main" val="0"/>
+              </a:ext>
+            </a:extLst>
+          </a:blip>
+          <a:stretch>
+            <a:fillRect/>
+          </a:stretch>
+        </p:blipFill>
+        <p:spPr>
+          <a:xfrm>
+            <a:off x="9184964" y="1346540"/>
+            <a:ext cx="2249226" cy="2022932"/>
+          </a:xfrm>
+          <a:prstGeom prst="rect">
+            <a:avLst/>
+          </a:prstGeom>
+        </p:spPr>
+      </p:pic>
+      <p:pic>
+        <p:nvPicPr>
+          <p:cNvPr id="16" name="図 15">
+            <a:extLst>
+              <a:ext uri="{FF2B5EF4-FFF2-40B4-BE49-F238E27FC236}">
+                <a16:creationId xmlns:a16="http://schemas.microsoft.com/office/drawing/2014/main" id="{94443492-3321-41B9-9296-DEB076CF5C44}"/>
+              </a:ext>
+            </a:extLst>
+          </p:cNvPr>
+          <p:cNvPicPr>
+            <a:picLocks noChangeAspect="1"/>
+          </p:cNvPicPr>
+          <p:nvPr/>
+        </p:nvPicPr>
+        <p:blipFill>
+          <a:blip r:embed="rId3">
+            <a:extLst>
+              <a:ext uri="{28A0092B-C50C-407E-A947-70E740481C1C}">
+                <a14:useLocalDpi xmlns:a14="http://schemas.microsoft.com/office/drawing/2010/main" val="0"/>
+              </a:ext>
+            </a:extLst>
+          </a:blip>
+          <a:stretch>
+            <a:fillRect/>
+          </a:stretch>
+        </p:blipFill>
+        <p:spPr>
+          <a:xfrm>
+            <a:off x="7896318" y="2444875"/>
+            <a:ext cx="733425" cy="735341"/>
+          </a:xfrm>
+          <a:prstGeom prst="rect">
+            <a:avLst/>
+          </a:prstGeom>
+        </p:spPr>
+      </p:pic>
+      <p:sp>
+        <p:nvSpPr>
+          <p:cNvPr id="17" name="テキスト ボックス 16">
+            <a:extLst>
+              <a:ext uri="{FF2B5EF4-FFF2-40B4-BE49-F238E27FC236}">
+                <a16:creationId xmlns:a16="http://schemas.microsoft.com/office/drawing/2014/main" id="{670B2B03-CB11-4C31-A7CD-BA65F935481F}"/>
+              </a:ext>
+            </a:extLst>
+          </p:cNvPr>
+          <p:cNvSpPr txBox="1"/>
+          <p:nvPr/>
+        </p:nvSpPr>
+        <p:spPr>
+          <a:xfrm>
+            <a:off x="7138417" y="3313427"/>
+            <a:ext cx="2249226" cy="646331"/>
+          </a:xfrm>
+          <a:prstGeom prst="rect">
+            <a:avLst/>
+          </a:prstGeom>
+          <a:noFill/>
+        </p:spPr>
+        <p:txBody>
+          <a:bodyPr wrap="square" rtlCol="0">
+            <a:spAutoFit/>
+          </a:bodyPr>
+          <a:lstStyle/>
+          <a:p>
+            <a:r>
+              <a:rPr kumimoji="1" lang="ja-JP" altLang="en-US" dirty="0"/>
+              <a:t>一定時間経つと玉はもとに戻る</a:t>
+            </a:r>
+          </a:p>
+        </p:txBody>
+      </p:sp>
+    </p:spTree>
+    <p:extLst>
+      <p:ext uri="{BB962C8B-B14F-4D97-AF65-F5344CB8AC3E}">
         <p14:creationId xmlns:p14="http://schemas.microsoft.com/office/powerpoint/2010/main" val="581867842"/>
+      </p:ext>
+    </p:extLst>
+  </p:cSld>
+  <p:clrMapOvr>
+    <a:masterClrMapping/>
+  </p:clrMapOvr>
+</p:sld>
+</file>
+
+<file path=ppt/slides/slide5.xml><?xml version="1.0" encoding="utf-8"?>
+<p:sld xmlns:a="http://schemas.openxmlformats.org/drawingml/2006/main" xmlns:r="http://schemas.openxmlformats.org/officeDocument/2006/relationships" xmlns:p="http://schemas.openxmlformats.org/presentationml/2006/main">
+  <p:cSld>
+    <p:spTree>
+      <p:nvGrpSpPr>
+        <p:cNvPr id="1" name=""/>
+        <p:cNvGrpSpPr/>
+        <p:nvPr/>
+      </p:nvGrpSpPr>
+      <p:grpSpPr>
+        <a:xfrm>
+          <a:off x="0" y="0"/>
+          <a:ext cx="0" cy="0"/>
+          <a:chOff x="0" y="0"/>
+          <a:chExt cx="0" cy="0"/>
+        </a:xfrm>
+      </p:grpSpPr>
+      <p:sp>
+        <p:nvSpPr>
+          <p:cNvPr id="4" name="テキスト ボックス 3">
+            <a:extLst>
+              <a:ext uri="{FF2B5EF4-FFF2-40B4-BE49-F238E27FC236}">
+                <a16:creationId xmlns:a16="http://schemas.microsoft.com/office/drawing/2014/main" id="{32E7901E-D909-44B6-8937-1E9F4AA09950}"/>
+              </a:ext>
+            </a:extLst>
+          </p:cNvPr>
+          <p:cNvSpPr txBox="1"/>
+          <p:nvPr/>
+        </p:nvSpPr>
+        <p:spPr>
+          <a:xfrm>
+            <a:off x="0" y="0"/>
+            <a:ext cx="8058150" cy="769441"/>
+          </a:xfrm>
+          <a:prstGeom prst="rect">
+            <a:avLst/>
+          </a:prstGeom>
+          <a:noFill/>
+        </p:spPr>
+        <p:txBody>
+          <a:bodyPr wrap="square" rtlCol="0">
+            <a:spAutoFit/>
+          </a:bodyPr>
+          <a:lstStyle/>
+          <a:p>
+            <a:r>
+              <a:rPr kumimoji="1" lang="ja-JP" altLang="en-US" sz="4400" dirty="0"/>
+              <a:t>ギミック：マップギミック</a:t>
+            </a:r>
+          </a:p>
+        </p:txBody>
+      </p:sp>
+      <p:pic>
+        <p:nvPicPr>
+          <p:cNvPr id="6" name="図 5">
+            <a:extLst>
+              <a:ext uri="{FF2B5EF4-FFF2-40B4-BE49-F238E27FC236}">
+                <a16:creationId xmlns:a16="http://schemas.microsoft.com/office/drawing/2014/main" id="{BB206747-C730-4345-9132-7D3DC229390D}"/>
+              </a:ext>
+            </a:extLst>
+          </p:cNvPr>
+          <p:cNvPicPr>
+            <a:picLocks noChangeAspect="1"/>
+          </p:cNvPicPr>
+          <p:nvPr/>
+        </p:nvPicPr>
+        <p:blipFill>
+          <a:blip r:embed="rId2">
+            <a:extLst>
+              <a:ext uri="{28A0092B-C50C-407E-A947-70E740481C1C}">
+                <a14:useLocalDpi xmlns:a14="http://schemas.microsoft.com/office/drawing/2010/main" val="0"/>
+              </a:ext>
+            </a:extLst>
+          </a:blip>
+          <a:stretch>
+            <a:fillRect/>
+          </a:stretch>
+        </p:blipFill>
+        <p:spPr>
+          <a:xfrm>
+            <a:off x="0" y="172355"/>
+            <a:ext cx="2916174" cy="2916174"/>
+          </a:xfrm>
+          <a:prstGeom prst="rect">
+            <a:avLst/>
+          </a:prstGeom>
+        </p:spPr>
+      </p:pic>
+      <p:pic>
+        <p:nvPicPr>
+          <p:cNvPr id="12" name="図 11">
+            <a:extLst>
+              <a:ext uri="{FF2B5EF4-FFF2-40B4-BE49-F238E27FC236}">
+                <a16:creationId xmlns:a16="http://schemas.microsoft.com/office/drawing/2014/main" id="{63EC999B-7B50-44D0-9F0C-6D2F5B5E9486}"/>
+              </a:ext>
+            </a:extLst>
+          </p:cNvPr>
+          <p:cNvPicPr>
+            <a:picLocks noChangeAspect="1"/>
+          </p:cNvPicPr>
+          <p:nvPr/>
+        </p:nvPicPr>
+        <p:blipFill>
+          <a:blip r:embed="rId3">
+            <a:extLst>
+              <a:ext uri="{28A0092B-C50C-407E-A947-70E740481C1C}">
+                <a14:useLocalDpi xmlns:a14="http://schemas.microsoft.com/office/drawing/2010/main" val="0"/>
+              </a:ext>
+            </a:extLst>
+          </a:blip>
+          <a:stretch>
+            <a:fillRect/>
+          </a:stretch>
+        </p:blipFill>
+        <p:spPr>
+          <a:xfrm>
+            <a:off x="2570988" y="0"/>
+            <a:ext cx="2916174" cy="3260884"/>
+          </a:xfrm>
+          <a:prstGeom prst="rect">
+            <a:avLst/>
+          </a:prstGeom>
+        </p:spPr>
+      </p:pic>
+      <p:pic>
+        <p:nvPicPr>
+          <p:cNvPr id="14" name="図 13">
+            <a:extLst>
+              <a:ext uri="{FF2B5EF4-FFF2-40B4-BE49-F238E27FC236}">
+                <a16:creationId xmlns:a16="http://schemas.microsoft.com/office/drawing/2014/main" id="{1D9967A7-6E77-4EB7-88AB-772B3CDEEA02}"/>
+              </a:ext>
+            </a:extLst>
+          </p:cNvPr>
+          <p:cNvPicPr>
+            <a:picLocks noChangeAspect="1"/>
+          </p:cNvPicPr>
+          <p:nvPr/>
+        </p:nvPicPr>
+        <p:blipFill>
+          <a:blip r:embed="rId4">
+            <a:extLst>
+              <a:ext uri="{28A0092B-C50C-407E-A947-70E740481C1C}">
+                <a14:useLocalDpi xmlns:a14="http://schemas.microsoft.com/office/drawing/2010/main" val="0"/>
+              </a:ext>
+            </a:extLst>
+          </a:blip>
+          <a:stretch>
+            <a:fillRect/>
+          </a:stretch>
+        </p:blipFill>
+        <p:spPr>
+          <a:xfrm>
+            <a:off x="0" y="1403861"/>
+            <a:ext cx="2916174" cy="2954274"/>
+          </a:xfrm>
+          <a:prstGeom prst="rect">
+            <a:avLst/>
+          </a:prstGeom>
+        </p:spPr>
+      </p:pic>
+      <p:pic>
+        <p:nvPicPr>
+          <p:cNvPr id="16" name="図 15">
+            <a:extLst>
+              <a:ext uri="{FF2B5EF4-FFF2-40B4-BE49-F238E27FC236}">
+                <a16:creationId xmlns:a16="http://schemas.microsoft.com/office/drawing/2014/main" id="{8D3C8A58-5329-4525-936D-470AB34A199E}"/>
+              </a:ext>
+            </a:extLst>
+          </p:cNvPr>
+          <p:cNvPicPr>
+            <a:picLocks noChangeAspect="1"/>
+          </p:cNvPicPr>
+          <p:nvPr/>
+        </p:nvPicPr>
+        <p:blipFill>
+          <a:blip r:embed="rId5">
+            <a:extLst>
+              <a:ext uri="{28A0092B-C50C-407E-A947-70E740481C1C}">
+                <a14:useLocalDpi xmlns:a14="http://schemas.microsoft.com/office/drawing/2010/main" val="0"/>
+              </a:ext>
+            </a:extLst>
+          </a:blip>
+          <a:stretch>
+            <a:fillRect/>
+          </a:stretch>
+        </p:blipFill>
+        <p:spPr>
+          <a:xfrm>
+            <a:off x="2590990" y="1249025"/>
+            <a:ext cx="2876169" cy="3260884"/>
+          </a:xfrm>
+          <a:prstGeom prst="rect">
+            <a:avLst/>
+          </a:prstGeom>
+        </p:spPr>
+      </p:pic>
+      <p:sp>
+        <p:nvSpPr>
+          <p:cNvPr id="17" name="テキスト ボックス 16">
+            <a:extLst>
+              <a:ext uri="{FF2B5EF4-FFF2-40B4-BE49-F238E27FC236}">
+                <a16:creationId xmlns:a16="http://schemas.microsoft.com/office/drawing/2014/main" id="{9F976FB8-4932-4919-98FE-841351D4BB40}"/>
+              </a:ext>
+            </a:extLst>
+          </p:cNvPr>
+          <p:cNvSpPr txBox="1"/>
+          <p:nvPr/>
+        </p:nvSpPr>
+        <p:spPr>
+          <a:xfrm>
+            <a:off x="0" y="769441"/>
+            <a:ext cx="2236510" cy="584775"/>
+          </a:xfrm>
+          <a:prstGeom prst="rect">
+            <a:avLst/>
+          </a:prstGeom>
+          <a:noFill/>
+        </p:spPr>
+        <p:txBody>
+          <a:bodyPr wrap="none" rtlCol="0">
+            <a:spAutoFit/>
+          </a:bodyPr>
+          <a:lstStyle/>
+          <a:p>
+            <a:r>
+              <a:rPr kumimoji="1" lang="ja-JP" altLang="en-US" sz="3200" dirty="0"/>
+              <a:t>切り替え床</a:t>
+            </a:r>
+          </a:p>
+        </p:txBody>
+      </p:sp>
+      <p:sp>
+        <p:nvSpPr>
+          <p:cNvPr id="18" name="テキスト ボックス 17">
+            <a:extLst>
+              <a:ext uri="{FF2B5EF4-FFF2-40B4-BE49-F238E27FC236}">
+                <a16:creationId xmlns:a16="http://schemas.microsoft.com/office/drawing/2014/main" id="{E9CFCC5E-09E6-49BD-ABEB-70A737CC8690}"/>
+              </a:ext>
+            </a:extLst>
+          </p:cNvPr>
+          <p:cNvSpPr txBox="1"/>
+          <p:nvPr/>
+        </p:nvSpPr>
+        <p:spPr>
+          <a:xfrm>
+            <a:off x="5821640" y="1354216"/>
+            <a:ext cx="4324350" cy="923330"/>
+          </a:xfrm>
+          <a:prstGeom prst="rect">
+            <a:avLst/>
+          </a:prstGeom>
+          <a:noFill/>
+        </p:spPr>
+        <p:txBody>
+          <a:bodyPr wrap="square" rtlCol="0">
+            <a:spAutoFit/>
+          </a:bodyPr>
+          <a:lstStyle/>
+          <a:p>
+            <a:r>
+              <a:rPr kumimoji="1" lang="ja-JP" altLang="en-US" dirty="0"/>
+              <a:t>透明状態ではすり抜け、ダッシュ</a:t>
+            </a:r>
+            <a:r>
+              <a:rPr lang="ja-JP" altLang="en-US" dirty="0"/>
+              <a:t>することで乗ることができる、凸のほうからはすり抜けて上に乗れる</a:t>
+            </a:r>
+            <a:endParaRPr lang="en-US" altLang="ja-JP" dirty="0"/>
+          </a:p>
+        </p:txBody>
+      </p:sp>
+      <p:sp>
+        <p:nvSpPr>
+          <p:cNvPr id="19" name="テキスト ボックス 18">
+            <a:extLst>
+              <a:ext uri="{FF2B5EF4-FFF2-40B4-BE49-F238E27FC236}">
+                <a16:creationId xmlns:a16="http://schemas.microsoft.com/office/drawing/2014/main" id="{361AEE38-D99F-4FA5-993B-03CBCD7227DD}"/>
+              </a:ext>
+            </a:extLst>
+          </p:cNvPr>
+          <p:cNvSpPr txBox="1"/>
+          <p:nvPr/>
+        </p:nvSpPr>
+        <p:spPr>
+          <a:xfrm>
+            <a:off x="5821640" y="2677655"/>
+            <a:ext cx="3185487" cy="369332"/>
+          </a:xfrm>
+          <a:prstGeom prst="rect">
+            <a:avLst/>
+          </a:prstGeom>
+          <a:noFill/>
+        </p:spPr>
+        <p:txBody>
+          <a:bodyPr wrap="none" rtlCol="0">
+            <a:spAutoFit/>
+          </a:bodyPr>
+          <a:lstStyle/>
+          <a:p>
+            <a:r>
+              <a:rPr kumimoji="1" lang="ja-JP" altLang="en-US" dirty="0"/>
+              <a:t>青が不透明のときは赤が透明</a:t>
+            </a:r>
+          </a:p>
+        </p:txBody>
+      </p:sp>
+      <p:sp>
+        <p:nvSpPr>
+          <p:cNvPr id="20" name="テキスト ボックス 19">
+            <a:extLst>
+              <a:ext uri="{FF2B5EF4-FFF2-40B4-BE49-F238E27FC236}">
+                <a16:creationId xmlns:a16="http://schemas.microsoft.com/office/drawing/2014/main" id="{24107AEE-A5FD-4118-BB8D-883C7692D9EA}"/>
+              </a:ext>
+            </a:extLst>
+          </p:cNvPr>
+          <p:cNvSpPr txBox="1"/>
+          <p:nvPr/>
+        </p:nvSpPr>
+        <p:spPr>
+          <a:xfrm>
+            <a:off x="0" y="3393227"/>
+            <a:ext cx="1005403" cy="584775"/>
+          </a:xfrm>
+          <a:prstGeom prst="rect">
+            <a:avLst/>
+          </a:prstGeom>
+          <a:noFill/>
+        </p:spPr>
+        <p:txBody>
+          <a:bodyPr wrap="none" rtlCol="0">
+            <a:spAutoFit/>
+          </a:bodyPr>
+          <a:lstStyle/>
+          <a:p>
+            <a:r>
+              <a:rPr kumimoji="1" lang="ja-JP" altLang="en-US" sz="3200" dirty="0"/>
+              <a:t>トゲ</a:t>
+            </a:r>
+          </a:p>
+        </p:txBody>
+      </p:sp>
+      <p:sp>
+        <p:nvSpPr>
+          <p:cNvPr id="21" name="テキスト ボックス 20">
+            <a:extLst>
+              <a:ext uri="{FF2B5EF4-FFF2-40B4-BE49-F238E27FC236}">
+                <a16:creationId xmlns:a16="http://schemas.microsoft.com/office/drawing/2014/main" id="{40DA1340-8840-4AF1-9923-DB2E0E1F165D}"/>
+              </a:ext>
+            </a:extLst>
+          </p:cNvPr>
+          <p:cNvSpPr txBox="1"/>
+          <p:nvPr/>
+        </p:nvSpPr>
+        <p:spPr>
+          <a:xfrm>
+            <a:off x="0" y="3948172"/>
+            <a:ext cx="1800493" cy="369332"/>
+          </a:xfrm>
+          <a:prstGeom prst="rect">
+            <a:avLst/>
+          </a:prstGeom>
+          <a:noFill/>
+        </p:spPr>
+        <p:txBody>
+          <a:bodyPr wrap="none" rtlCol="0">
+            <a:spAutoFit/>
+          </a:bodyPr>
+          <a:lstStyle/>
+          <a:p>
+            <a:r>
+              <a:rPr lang="ja-JP" altLang="en-US" dirty="0"/>
+              <a:t>当たったら死ぬ</a:t>
+            </a:r>
+            <a:endParaRPr kumimoji="1" lang="ja-JP" altLang="en-US" dirty="0"/>
+          </a:p>
+        </p:txBody>
+      </p:sp>
+      <p:sp>
+        <p:nvSpPr>
+          <p:cNvPr id="22" name="テキスト ボックス 21">
+            <a:extLst>
+              <a:ext uri="{FF2B5EF4-FFF2-40B4-BE49-F238E27FC236}">
+                <a16:creationId xmlns:a16="http://schemas.microsoft.com/office/drawing/2014/main" id="{43AE2112-0EC4-4592-A173-4A06F44AE85F}"/>
+              </a:ext>
+            </a:extLst>
+          </p:cNvPr>
+          <p:cNvSpPr txBox="1"/>
+          <p:nvPr/>
+        </p:nvSpPr>
+        <p:spPr>
+          <a:xfrm>
+            <a:off x="0" y="4256884"/>
+            <a:ext cx="1005403" cy="584775"/>
+          </a:xfrm>
+          <a:prstGeom prst="rect">
+            <a:avLst/>
+          </a:prstGeom>
+          <a:noFill/>
+        </p:spPr>
+        <p:txBody>
+          <a:bodyPr wrap="none" rtlCol="0">
+            <a:spAutoFit/>
+          </a:bodyPr>
+          <a:lstStyle/>
+          <a:p>
+            <a:r>
+              <a:rPr lang="ja-JP" altLang="en-US" sz="3200" dirty="0"/>
+              <a:t>バネ</a:t>
+            </a:r>
+            <a:endParaRPr kumimoji="1" lang="ja-JP" altLang="en-US" sz="3200" dirty="0"/>
+          </a:p>
+        </p:txBody>
+      </p:sp>
+      <p:sp>
+        <p:nvSpPr>
+          <p:cNvPr id="23" name="テキスト ボックス 22">
+            <a:extLst>
+              <a:ext uri="{FF2B5EF4-FFF2-40B4-BE49-F238E27FC236}">
+                <a16:creationId xmlns:a16="http://schemas.microsoft.com/office/drawing/2014/main" id="{17980EB3-A5AA-4447-A1D9-238F5AFA78A7}"/>
+              </a:ext>
+            </a:extLst>
+          </p:cNvPr>
+          <p:cNvSpPr txBox="1"/>
+          <p:nvPr/>
+        </p:nvSpPr>
+        <p:spPr>
+          <a:xfrm>
+            <a:off x="0" y="4730709"/>
+            <a:ext cx="8032968" cy="369332"/>
+          </a:xfrm>
+          <a:prstGeom prst="rect">
+            <a:avLst/>
+          </a:prstGeom>
+          <a:noFill/>
+        </p:spPr>
+        <p:txBody>
+          <a:bodyPr wrap="none" rtlCol="0">
+            <a:spAutoFit/>
+          </a:bodyPr>
+          <a:lstStyle/>
+          <a:p>
+            <a:r>
+              <a:rPr kumimoji="1" lang="ja-JP" altLang="en-US" dirty="0"/>
+              <a:t>踏むと跳ねて床判定としてスタミナが回復する</a:t>
+            </a:r>
+            <a:r>
+              <a:rPr lang="ja-JP" altLang="en-US" dirty="0"/>
+              <a:t>、壁にもあったりするカモ？</a:t>
+            </a:r>
+            <a:endParaRPr kumimoji="1" lang="ja-JP" altLang="en-US" dirty="0"/>
+          </a:p>
+        </p:txBody>
+      </p:sp>
+      <p:sp>
+        <p:nvSpPr>
+          <p:cNvPr id="24" name="テキスト ボックス 23">
+            <a:extLst>
+              <a:ext uri="{FF2B5EF4-FFF2-40B4-BE49-F238E27FC236}">
+                <a16:creationId xmlns:a16="http://schemas.microsoft.com/office/drawing/2014/main" id="{D3C5B118-6938-4EDB-BCF3-0FA63DBA26EA}"/>
+              </a:ext>
+            </a:extLst>
+          </p:cNvPr>
+          <p:cNvSpPr txBox="1"/>
+          <p:nvPr/>
+        </p:nvSpPr>
+        <p:spPr>
+          <a:xfrm>
+            <a:off x="1" y="5136888"/>
+            <a:ext cx="1826141" cy="584775"/>
+          </a:xfrm>
+          <a:prstGeom prst="rect">
+            <a:avLst/>
+          </a:prstGeom>
+          <a:noFill/>
+        </p:spPr>
+        <p:txBody>
+          <a:bodyPr wrap="none" rtlCol="0">
+            <a:spAutoFit/>
+          </a:bodyPr>
+          <a:lstStyle/>
+          <a:p>
+            <a:r>
+              <a:rPr kumimoji="1" lang="ja-JP" altLang="en-US" sz="3200" dirty="0"/>
+              <a:t>プロペラ</a:t>
+            </a:r>
+          </a:p>
+        </p:txBody>
+      </p:sp>
+      <p:sp>
+        <p:nvSpPr>
+          <p:cNvPr id="25" name="テキスト ボックス 24">
+            <a:extLst>
+              <a:ext uri="{FF2B5EF4-FFF2-40B4-BE49-F238E27FC236}">
+                <a16:creationId xmlns:a16="http://schemas.microsoft.com/office/drawing/2014/main" id="{D2253D43-8C79-4742-AAF6-83DF8D93EEBB}"/>
+              </a:ext>
+            </a:extLst>
+          </p:cNvPr>
+          <p:cNvSpPr txBox="1"/>
+          <p:nvPr/>
+        </p:nvSpPr>
+        <p:spPr>
+          <a:xfrm>
+            <a:off x="0" y="5570140"/>
+            <a:ext cx="10110460" cy="369332"/>
+          </a:xfrm>
+          <a:prstGeom prst="rect">
+            <a:avLst/>
+          </a:prstGeom>
+          <a:noFill/>
+        </p:spPr>
+        <p:txBody>
+          <a:bodyPr wrap="none" rtlCol="0">
+            <a:spAutoFit/>
+          </a:bodyPr>
+          <a:lstStyle/>
+          <a:p>
+            <a:r>
+              <a:rPr kumimoji="1" lang="ja-JP" altLang="en-US" dirty="0"/>
+              <a:t>風を出す、下から上に出せばプレイヤーは浮き、左右に出せば進行方向に追い風</a:t>
+            </a:r>
+            <a:r>
+              <a:rPr lang="ja-JP" altLang="en-US" dirty="0"/>
+              <a:t>を出したりする</a:t>
+            </a:r>
+            <a:endParaRPr kumimoji="1" lang="ja-JP" altLang="en-US" dirty="0"/>
+          </a:p>
+        </p:txBody>
+      </p:sp>
+      <p:sp>
+        <p:nvSpPr>
+          <p:cNvPr id="26" name="テキスト ボックス 25">
+            <a:extLst>
+              <a:ext uri="{FF2B5EF4-FFF2-40B4-BE49-F238E27FC236}">
+                <a16:creationId xmlns:a16="http://schemas.microsoft.com/office/drawing/2014/main" id="{8A2CDE5E-F861-4829-B54A-F60CD8AD5F17}"/>
+              </a:ext>
+            </a:extLst>
+          </p:cNvPr>
+          <p:cNvSpPr txBox="1"/>
+          <p:nvPr/>
+        </p:nvSpPr>
+        <p:spPr>
+          <a:xfrm>
+            <a:off x="1" y="5899374"/>
+            <a:ext cx="5016117" cy="584775"/>
+          </a:xfrm>
+          <a:prstGeom prst="rect">
+            <a:avLst/>
+          </a:prstGeom>
+          <a:noFill/>
+        </p:spPr>
+        <p:txBody>
+          <a:bodyPr wrap="none" rtlCol="0">
+            <a:spAutoFit/>
+          </a:bodyPr>
+          <a:lstStyle/>
+          <a:p>
+            <a:r>
+              <a:rPr kumimoji="1" lang="ja-JP" altLang="en-US" sz="3200" dirty="0"/>
+              <a:t>バンパー</a:t>
+            </a:r>
+            <a:r>
+              <a:rPr kumimoji="1" lang="en-US" altLang="ja-JP" sz="3200" dirty="0"/>
+              <a:t>(</a:t>
+            </a:r>
+            <a:r>
+              <a:rPr kumimoji="1" lang="ja-JP" altLang="en-US" sz="3200" dirty="0"/>
+              <a:t>作るのむずそう</a:t>
+            </a:r>
+            <a:r>
+              <a:rPr kumimoji="1" lang="en-US" altLang="ja-JP" sz="3200" dirty="0"/>
+              <a:t>)</a:t>
+            </a:r>
+            <a:endParaRPr kumimoji="1" lang="ja-JP" altLang="en-US" sz="3200" dirty="0"/>
+          </a:p>
+        </p:txBody>
+      </p:sp>
+      <p:sp>
+        <p:nvSpPr>
+          <p:cNvPr id="27" name="テキスト ボックス 26">
+            <a:extLst>
+              <a:ext uri="{FF2B5EF4-FFF2-40B4-BE49-F238E27FC236}">
+                <a16:creationId xmlns:a16="http://schemas.microsoft.com/office/drawing/2014/main" id="{E1C66D7E-D686-4425-B8FC-BBFA881E0A77}"/>
+              </a:ext>
+            </a:extLst>
+          </p:cNvPr>
+          <p:cNvSpPr txBox="1"/>
+          <p:nvPr/>
+        </p:nvSpPr>
+        <p:spPr>
+          <a:xfrm>
+            <a:off x="-39112" y="6409571"/>
+            <a:ext cx="3416320" cy="369332"/>
+          </a:xfrm>
+          <a:prstGeom prst="rect">
+            <a:avLst/>
+          </a:prstGeom>
+          <a:noFill/>
+        </p:spPr>
+        <p:txBody>
+          <a:bodyPr wrap="none" rtlCol="0">
+            <a:spAutoFit/>
+          </a:bodyPr>
+          <a:lstStyle/>
+          <a:p>
+            <a:r>
+              <a:rPr kumimoji="1" lang="ja-JP" altLang="en-US" dirty="0"/>
+              <a:t>当たると当たった方向に跳ねる</a:t>
+            </a:r>
+          </a:p>
+        </p:txBody>
+      </p:sp>
+      <p:sp>
+        <p:nvSpPr>
+          <p:cNvPr id="28" name="楕円 27">
+            <a:extLst>
+              <a:ext uri="{FF2B5EF4-FFF2-40B4-BE49-F238E27FC236}">
+                <a16:creationId xmlns:a16="http://schemas.microsoft.com/office/drawing/2014/main" id="{36B2F60E-A182-4C0C-BA22-793965CEE52D}"/>
+              </a:ext>
+            </a:extLst>
+          </p:cNvPr>
+          <p:cNvSpPr/>
+          <p:nvPr/>
+        </p:nvSpPr>
+        <p:spPr>
+          <a:xfrm>
+            <a:off x="4933663" y="5914654"/>
+            <a:ext cx="1028891" cy="944503"/>
+          </a:xfrm>
+          <a:prstGeom prst="ellipse">
+            <a:avLst/>
+          </a:prstGeom>
+          <a:solidFill>
+            <a:schemeClr val="bg1"/>
+          </a:solidFill>
+          <a:ln>
+            <a:solidFill>
+              <a:schemeClr val="tx1"/>
+            </a:solidFill>
+          </a:ln>
+        </p:spPr>
+        <p:style>
+          <a:lnRef idx="2">
+            <a:schemeClr val="accent1">
+              <a:shade val="50000"/>
+            </a:schemeClr>
+          </a:lnRef>
+          <a:fillRef idx="1">
+            <a:schemeClr val="accent1"/>
+          </a:fillRef>
+          <a:effectRef idx="0">
+            <a:schemeClr val="accent1"/>
+          </a:effectRef>
+          <a:fontRef idx="minor">
+            <a:schemeClr val="lt1"/>
+          </a:fontRef>
+        </p:style>
+        <p:txBody>
+          <a:bodyPr rtlCol="0" anchor="ctr"/>
+          <a:lstStyle/>
+          <a:p>
+            <a:pPr algn="ctr"/>
+            <a:endParaRPr kumimoji="1" lang="ja-JP" altLang="en-US"/>
+          </a:p>
+        </p:txBody>
+      </p:sp>
+      <p:sp>
+        <p:nvSpPr>
+          <p:cNvPr id="29" name="テキスト ボックス 28">
+            <a:extLst>
+              <a:ext uri="{FF2B5EF4-FFF2-40B4-BE49-F238E27FC236}">
+                <a16:creationId xmlns:a16="http://schemas.microsoft.com/office/drawing/2014/main" id="{3AD833C7-16E6-4079-A4DA-CD460F943EC4}"/>
+              </a:ext>
+            </a:extLst>
+          </p:cNvPr>
+          <p:cNvSpPr txBox="1"/>
+          <p:nvPr/>
+        </p:nvSpPr>
+        <p:spPr>
+          <a:xfrm>
+            <a:off x="5988546" y="6238814"/>
+            <a:ext cx="2441694" cy="369332"/>
+          </a:xfrm>
+          <a:prstGeom prst="rect">
+            <a:avLst/>
+          </a:prstGeom>
+          <a:noFill/>
+        </p:spPr>
+        <p:txBody>
+          <a:bodyPr wrap="none" rtlCol="0">
+            <a:spAutoFit/>
+          </a:bodyPr>
+          <a:lstStyle/>
+          <a:p>
+            <a:r>
+              <a:rPr lang="ja-JP" altLang="en-US" dirty="0"/>
+              <a:t>←見た目こんなの</a:t>
+            </a:r>
+            <a:r>
+              <a:rPr lang="en-US" altLang="ja-JP" dirty="0"/>
+              <a:t>(</a:t>
+            </a:r>
+            <a:r>
+              <a:rPr lang="ja-JP" altLang="en-US" dirty="0"/>
+              <a:t>仮</a:t>
+            </a:r>
+            <a:r>
+              <a:rPr lang="en-US" altLang="ja-JP" dirty="0"/>
+              <a:t>)</a:t>
+            </a:r>
+            <a:endParaRPr kumimoji="1" lang="ja-JP" altLang="en-US" dirty="0"/>
+          </a:p>
+        </p:txBody>
+      </p:sp>
+    </p:spTree>
+    <p:extLst>
+      <p:ext uri="{BB962C8B-B14F-4D97-AF65-F5344CB8AC3E}">
+        <p14:creationId xmlns:p14="http://schemas.microsoft.com/office/powerpoint/2010/main" val="228149641"/>
       </p:ext>
     </p:extLst>
   </p:cSld>
